--- a/public/project/Exam_Presentation_Antenna_RUL_SRH.pptx
+++ b/public/project/Exam_Presentation_Antenna_RUL_SRH.pptx
@@ -21,13 +21,6 @@
     <p:sldId id="269" r:id="rId20"/>
     <p:sldId id="270" r:id="rId21"/>
     <p:sldId id="271" r:id="rId22"/>
-    <p:sldId id="272" r:id="rId23"/>
-    <p:sldId id="273" r:id="rId24"/>
-    <p:sldId id="274" r:id="rId25"/>
-    <p:sldId id="275" r:id="rId26"/>
-    <p:sldId id="276" r:id="rId27"/>
-    <p:sldId id="277" r:id="rId28"/>
-    <p:sldId id="278" r:id="rId29"/>
   </p:sldIdLst>
   <p:sldSz cx="12191695" cy="6858000" type="screen4x3"/>
   <p:notesSz cx="6858000" cy="9144000"/>
@@ -3110,9 +3103,95 @@
         <p:nvPr/>
       </p:nvGrpSpPr>
       <p:grpSpPr/>
+      <p:sp>
+        <p:nvSpPr>
+          <p:cNvPr id="2" name="Rectangle 1"/>
+          <p:cNvSpPr/>
+          <p:nvPr/>
+        </p:nvSpPr>
+        <p:spPr>
+          <a:xfrm>
+            <a:off x="0" y="0"/>
+            <a:ext cx="12191695" cy="6858000"/>
+          </a:xfrm>
+          <a:prstGeom prst="rect">
+            <a:avLst/>
+          </a:prstGeom>
+          <a:solidFill>
+            <a:srgbClr val="0B1D35"/>
+          </a:solidFill>
+          <a:ln>
+            <a:noFill/>
+          </a:ln>
+        </p:spPr>
+        <p:style>
+          <a:lnRef idx="1">
+            <a:schemeClr val="accent1"/>
+          </a:lnRef>
+          <a:fillRef idx="3">
+            <a:schemeClr val="accent1"/>
+          </a:fillRef>
+          <a:effectRef idx="2">
+            <a:schemeClr val="accent1"/>
+          </a:effectRef>
+          <a:fontRef idx="minor">
+            <a:schemeClr val="lt1"/>
+          </a:fontRef>
+        </p:style>
+        <p:txBody>
+          <a:bodyPr rtlCol="0" anchor="ctr"/>
+          <a:lstStyle/>
+          <a:p>
+            <a:pPr algn="ctr"/>
+          </a:p>
+        </p:txBody>
+      </p:sp>
+      <p:sp>
+        <p:nvSpPr>
+          <p:cNvPr id="3" name="Rectangle 2"/>
+          <p:cNvSpPr/>
+          <p:nvPr/>
+        </p:nvSpPr>
+        <p:spPr>
+          <a:xfrm>
+            <a:off x="0" y="5989320"/>
+            <a:ext cx="12191695" cy="868680"/>
+          </a:xfrm>
+          <a:prstGeom prst="rect">
+            <a:avLst/>
+          </a:prstGeom>
+          <a:solidFill>
+            <a:srgbClr val="DF4707"/>
+          </a:solidFill>
+          <a:ln>
+            <a:noFill/>
+          </a:ln>
+        </p:spPr>
+        <p:style>
+          <a:lnRef idx="1">
+            <a:schemeClr val="accent1"/>
+          </a:lnRef>
+          <a:fillRef idx="3">
+            <a:schemeClr val="accent1"/>
+          </a:fillRef>
+          <a:effectRef idx="2">
+            <a:schemeClr val="accent1"/>
+          </a:effectRef>
+          <a:fontRef idx="minor">
+            <a:schemeClr val="lt1"/>
+          </a:fontRef>
+        </p:style>
+        <p:txBody>
+          <a:bodyPr rtlCol="0" anchor="ctr"/>
+          <a:lstStyle/>
+          <a:p>
+            <a:pPr algn="ctr"/>
+          </a:p>
+        </p:txBody>
+      </p:sp>
       <p:pic>
         <p:nvPicPr>
-          <p:cNvPr id="2" name="Picture 1" descr="bg_title_antenna.png"/>
+          <p:cNvPr id="4" name="Picture 3" descr="srh_logo_white.png"/>
           <p:cNvPicPr>
             <a:picLocks noChangeAspect="1"/>
           </p:cNvPicPr>
@@ -3126,48 +3205,24 @@
         </p:blipFill>
         <p:spPr>
           <a:xfrm>
-            <a:off x="0" y="0"/>
-            <a:ext cx="12191695" cy="6858000"/>
+            <a:off x="685800" y="411480"/>
+            <a:ext cx="827690" cy="640080"/>
           </a:xfrm>
           <a:prstGeom prst="rect">
             <a:avLst/>
           </a:prstGeom>
         </p:spPr>
       </p:pic>
-      <p:pic>
-        <p:nvPicPr>
-          <p:cNvPr id="3" name="Picture 2" descr="srh_logo_white.png"/>
-          <p:cNvPicPr>
-            <a:picLocks noChangeAspect="1"/>
-          </p:cNvPicPr>
-          <p:nvPr/>
-        </p:nvPicPr>
-        <p:blipFill>
-          <a:blip r:embed="rId3"/>
-          <a:stretch>
-            <a:fillRect/>
-          </a:stretch>
-        </p:blipFill>
-        <p:spPr>
-          <a:xfrm>
-            <a:off x="411480" y="320040"/>
-            <a:ext cx="768569" cy="594360"/>
-          </a:xfrm>
-          <a:prstGeom prst="rect">
-            <a:avLst/>
-          </a:prstGeom>
-        </p:spPr>
-      </p:pic>
-      <p:sp>
-        <p:nvSpPr>
-          <p:cNvPr id="4" name="TextBox 3"/>
+      <p:sp>
+        <p:nvSpPr>
+          <p:cNvPr id="5" name="TextBox 4"/>
           <p:cNvSpPr txBox="1"/>
           <p:nvPr/>
         </p:nvSpPr>
         <p:spPr>
           <a:xfrm>
-            <a:off x="502920" y="2194560"/>
-            <a:ext cx="6858000" cy="2286000"/>
+            <a:off x="685800" y="1691640"/>
+            <a:ext cx="10058400" cy="2011680"/>
           </a:xfrm>
           <a:prstGeom prst="rect">
             <a:avLst/>
@@ -3181,7 +3236,7 @@
           <a:lstStyle/>
           <a:p>
             <a:pPr>
-              <a:defRPr sz="3200" b="1">
+              <a:defRPr sz="3600" b="1">
                 <a:solidFill>
                   <a:srgbClr val="FFFFFF"/>
                 </a:solidFill>
@@ -3195,9 +3250,132 @@
           <a:p>
             <a:pPr>
               <a:spcBef>
-                <a:spcPts val="800"/>
+                <a:spcPts val="1400"/>
               </a:spcBef>
-              <a:defRPr sz="2200">
+              <a:defRPr sz="2400">
+                <a:solidFill>
+                  <a:srgbClr val="FDD9C9"/>
+                </a:solidFill>
+                <a:latin typeface="Calibri"/>
+              </a:defRPr>
+            </a:pPr>
+            <a:r>
+              <a:t>5G/6G Telecom Tower Antenna Digital Twin</a:t>
+            </a:r>
+          </a:p>
+        </p:txBody>
+      </p:sp>
+      <p:sp>
+        <p:nvSpPr>
+          <p:cNvPr id="6" name="TextBox 5"/>
+          <p:cNvSpPr txBox="1"/>
+          <p:nvPr/>
+        </p:nvSpPr>
+        <p:spPr>
+          <a:xfrm>
+            <a:off x="685800" y="3977639"/>
+            <a:ext cx="8229600" cy="1645920"/>
+          </a:xfrm>
+          <a:prstGeom prst="rect">
+            <a:avLst/>
+          </a:prstGeom>
+          <a:noFill/>
+        </p:spPr>
+        <p:txBody>
+          <a:bodyPr wrap="none">
+            <a:spAutoFit/>
+          </a:bodyPr>
+          <a:lstStyle/>
+          <a:p>
+            <a:pPr>
+              <a:spcAft>
+                <a:spcPts val="600"/>
+              </a:spcAft>
+              <a:defRPr sz="1500">
+                <a:solidFill>
+                  <a:srgbClr val="D2DCE6"/>
+                </a:solidFill>
+                <a:latin typeface="Calibri"/>
+              </a:defRPr>
+            </a:pPr>
+            <a:r>
+              <a:t>Modeling, Simulation &amp; Digital Twin</a:t>
+            </a:r>
+          </a:p>
+          <a:p>
+            <a:pPr>
+              <a:spcAft>
+                <a:spcPts val="600"/>
+              </a:spcAft>
+              <a:defRPr sz="1500">
+                <a:solidFill>
+                  <a:srgbClr val="D2DCE6"/>
+                </a:solidFill>
+                <a:latin typeface="Calibri"/>
+              </a:defRPr>
+            </a:pPr>
+            <a:r>
+              <a:t>Prof. Dr. Adele Nasti</a:t>
+            </a:r>
+          </a:p>
+          <a:p>
+            <a:pPr>
+              <a:spcAft>
+                <a:spcPts val="600"/>
+              </a:spcAft>
+              <a:defRPr sz="1500">
+                <a:solidFill>
+                  <a:srgbClr val="D2DCE6"/>
+                </a:solidFill>
+                <a:latin typeface="Calibri"/>
+              </a:defRPr>
+            </a:pPr>
+            <a:r>
+              <a:t>Srivardhan Varma Mudunuri  ·  Matric. 100001259</a:t>
+            </a:r>
+          </a:p>
+          <a:p>
+            <a:pPr>
+              <a:spcAft>
+                <a:spcPts val="600"/>
+              </a:spcAft>
+              <a:defRPr sz="1500">
+                <a:solidFill>
+                  <a:srgbClr val="D2DCE6"/>
+                </a:solidFill>
+                <a:latin typeface="Calibri"/>
+              </a:defRPr>
+            </a:pPr>
+            <a:r>
+              <a:t>Final Exam · 10–15 minutes</a:t>
+            </a:r>
+          </a:p>
+        </p:txBody>
+      </p:sp>
+      <p:sp>
+        <p:nvSpPr>
+          <p:cNvPr id="7" name="TextBox 6"/>
+          <p:cNvSpPr txBox="1"/>
+          <p:nvPr/>
+        </p:nvSpPr>
+        <p:spPr>
+          <a:xfrm>
+            <a:off x="685800" y="6144768"/>
+            <a:ext cx="10058400" cy="457200"/>
+          </a:xfrm>
+          <a:prstGeom prst="rect">
+            <a:avLst/>
+          </a:prstGeom>
+          <a:noFill/>
+        </p:spPr>
+        <p:txBody>
+          <a:bodyPr wrap="none">
+            <a:spAutoFit/>
+          </a:bodyPr>
+          <a:lstStyle/>
+          <a:p>
+            <a:pPr>
+              <a:defRPr sz="1300">
                 <a:solidFill>
                   <a:srgbClr val="FFFFFF"/>
                 </a:solidFill>
@@ -3205,7 +3383,7 @@
               </a:defRPr>
             </a:pPr>
             <a:r>
-              <a:t>5G/6G Telecom Tower Antenna Digital Twin</a:t>
+              <a:t>Srivardhan Varma Mudunuri  ·  Matric. 100001259</a:t>
             </a:r>
           </a:p>
         </p:txBody>
@@ -3228,9 +3406,52 @@
         <p:nvPr/>
       </p:nvGrpSpPr>
       <p:grpSpPr/>
+      <p:sp>
+        <p:nvSpPr>
+          <p:cNvPr id="2" name="Rectangle 1"/>
+          <p:cNvSpPr/>
+          <p:nvPr/>
+        </p:nvSpPr>
+        <p:spPr>
+          <a:xfrm>
+            <a:off x="0" y="0"/>
+            <a:ext cx="12191695" cy="1097280"/>
+          </a:xfrm>
+          <a:prstGeom prst="rect">
+            <a:avLst/>
+          </a:prstGeom>
+          <a:solidFill>
+            <a:srgbClr val="DF4707"/>
+          </a:solidFill>
+          <a:ln>
+            <a:noFill/>
+          </a:ln>
+        </p:spPr>
+        <p:style>
+          <a:lnRef idx="1">
+            <a:schemeClr val="accent1"/>
+          </a:lnRef>
+          <a:fillRef idx="3">
+            <a:schemeClr val="accent1"/>
+          </a:fillRef>
+          <a:effectRef idx="2">
+            <a:schemeClr val="accent1"/>
+          </a:effectRef>
+          <a:fontRef idx="minor">
+            <a:schemeClr val="lt1"/>
+          </a:fontRef>
+        </p:style>
+        <p:txBody>
+          <a:bodyPr rtlCol="0" anchor="ctr"/>
+          <a:lstStyle/>
+          <a:p>
+            <a:pPr algn="ctr"/>
+          </a:p>
+        </p:txBody>
+      </p:sp>
       <p:pic>
         <p:nvPicPr>
-          <p:cNvPr id="2" name="Picture 1" descr="section_01_problem.png"/>
+          <p:cNvPr id="3" name="Picture 2" descr="srh_logo_orange.png"/>
           <p:cNvPicPr>
             <a:picLocks noChangeAspect="1"/>
           </p:cNvPicPr>
@@ -3244,17 +3465,132 @@
         </p:blipFill>
         <p:spPr>
           <a:xfrm>
-            <a:off x="0" y="0"/>
-            <a:ext cx="12191695" cy="6858000"/>
+            <a:off x="10835640" y="256032"/>
+            <a:ext cx="1131570" cy="502920"/>
           </a:xfrm>
           <a:prstGeom prst="rect">
             <a:avLst/>
           </a:prstGeom>
         </p:spPr>
       </p:pic>
+      <p:sp>
+        <p:nvSpPr>
+          <p:cNvPr id="4" name="TextBox 3"/>
+          <p:cNvSpPr txBox="1"/>
+          <p:nvPr/>
+        </p:nvSpPr>
+        <p:spPr>
+          <a:xfrm>
+            <a:off x="685800" y="201168"/>
+            <a:ext cx="9601200" cy="502920"/>
+          </a:xfrm>
+          <a:prstGeom prst="rect">
+            <a:avLst/>
+          </a:prstGeom>
+          <a:noFill/>
+        </p:spPr>
+        <p:txBody>
+          <a:bodyPr wrap="none">
+            <a:spAutoFit/>
+          </a:bodyPr>
+          <a:lstStyle/>
+          <a:p>
+            <a:pPr>
+              <a:defRPr sz="3000" b="1">
+                <a:solidFill>
+                  <a:srgbClr val="FFFFFF"/>
+                </a:solidFill>
+                <a:latin typeface="Calibri"/>
+              </a:defRPr>
+            </a:pPr>
+            <a:r>
+              <a:t>9 · Operating Envelope</a:t>
+            </a:r>
+          </a:p>
+        </p:txBody>
+      </p:sp>
+      <p:sp>
+        <p:nvSpPr>
+          <p:cNvPr id="5" name="TextBox 4"/>
+          <p:cNvSpPr txBox="1"/>
+          <p:nvPr/>
+        </p:nvSpPr>
+        <p:spPr>
+          <a:xfrm>
+            <a:off x="685800" y="713232"/>
+            <a:ext cx="9601200" cy="320040"/>
+          </a:xfrm>
+          <a:prstGeom prst="rect">
+            <a:avLst/>
+          </a:prstGeom>
+          <a:noFill/>
+        </p:spPr>
+        <p:txBody>
+          <a:bodyPr wrap="none">
+            <a:spAutoFit/>
+          </a:bodyPr>
+          <a:lstStyle/>
+          <a:p>
+            <a:pPr>
+              <a:defRPr sz="1500">
+                <a:solidFill>
+                  <a:srgbClr val="FDD9C9"/>
+                </a:solidFill>
+                <a:latin typeface="Calibri"/>
+              </a:defRPr>
+            </a:pPr>
+            <a:r>
+              <a:t>Safe operating recommendation</a:t>
+            </a:r>
+          </a:p>
+        </p:txBody>
+      </p:sp>
+      <p:sp>
+        <p:nvSpPr>
+          <p:cNvPr id="6" name="Rectangle 5"/>
+          <p:cNvSpPr/>
+          <p:nvPr/>
+        </p:nvSpPr>
+        <p:spPr>
+          <a:xfrm>
+            <a:off x="0" y="1097280"/>
+            <a:ext cx="12191695" cy="5760720"/>
+          </a:xfrm>
+          <a:prstGeom prst="rect">
+            <a:avLst/>
+          </a:prstGeom>
+          <a:solidFill>
+            <a:srgbClr val="FFFFFF"/>
+          </a:solidFill>
+          <a:ln>
+            <a:noFill/>
+          </a:ln>
+        </p:spPr>
+        <p:style>
+          <a:lnRef idx="1">
+            <a:schemeClr val="accent1"/>
+          </a:lnRef>
+          <a:fillRef idx="3">
+            <a:schemeClr val="accent1"/>
+          </a:fillRef>
+          <a:effectRef idx="2">
+            <a:schemeClr val="accent1"/>
+          </a:effectRef>
+          <a:fontRef idx="minor">
+            <a:schemeClr val="lt1"/>
+          </a:fontRef>
+        </p:style>
+        <p:txBody>
+          <a:bodyPr rtlCol="0" anchor="ctr"/>
+          <a:lstStyle/>
+          <a:p>
+            <a:pPr algn="ctr"/>
+          </a:p>
+        </p:txBody>
+      </p:sp>
       <p:pic>
         <p:nvPicPr>
-          <p:cNvPr id="3" name="Picture 2" descr="srh_logo_white.png"/>
+          <p:cNvPr id="7" name="Picture 6" descr="04_operating_envelope.png"/>
           <p:cNvPicPr>
             <a:picLocks noChangeAspect="1"/>
           </p:cNvPicPr>
@@ -3268,14 +3604,122 @@
         </p:blipFill>
         <p:spPr>
           <a:xfrm>
-            <a:off x="10972800" y="320040"/>
-            <a:ext cx="650328" cy="502920"/>
+            <a:off x="2717308" y="1417320"/>
+            <a:ext cx="6757077" cy="4389120"/>
           </a:xfrm>
           <a:prstGeom prst="rect">
             <a:avLst/>
           </a:prstGeom>
         </p:spPr>
       </p:pic>
+      <p:sp>
+        <p:nvSpPr>
+          <p:cNvPr id="8" name="TextBox 7"/>
+          <p:cNvSpPr txBox="1"/>
+          <p:nvPr/>
+        </p:nvSpPr>
+        <p:spPr>
+          <a:xfrm>
+            <a:off x="685800" y="5879592"/>
+            <a:ext cx="10820095" cy="365760"/>
+          </a:xfrm>
+          <a:prstGeom prst="rect">
+            <a:avLst/>
+          </a:prstGeom>
+          <a:noFill/>
+        </p:spPr>
+        <p:txBody>
+          <a:bodyPr wrap="none">
+            <a:spAutoFit/>
+          </a:bodyPr>
+          <a:lstStyle/>
+          <a:p>
+            <a:pPr>
+              <a:defRPr sz="1300" i="1">
+                <a:solidFill>
+                  <a:srgbClr val="5A5A5A"/>
+                </a:solidFill>
+                <a:latin typeface="Calibri"/>
+              </a:defRPr>
+            </a:pPr>
+            <a:r>
+              <a:t>Safe ops: wind ≤ 12 m/s and temp ≤ 30 °C → RUL &gt; 10 years</a:t>
+            </a:r>
+          </a:p>
+        </p:txBody>
+      </p:sp>
+      <p:sp>
+        <p:nvSpPr>
+          <p:cNvPr id="9" name="TextBox 8"/>
+          <p:cNvSpPr txBox="1"/>
+          <p:nvPr/>
+        </p:nvSpPr>
+        <p:spPr>
+          <a:xfrm>
+            <a:off x="685800" y="6473952"/>
+            <a:ext cx="9144000" cy="274320"/>
+          </a:xfrm>
+          <a:prstGeom prst="rect">
+            <a:avLst/>
+          </a:prstGeom>
+          <a:noFill/>
+        </p:spPr>
+        <p:txBody>
+          <a:bodyPr wrap="none">
+            <a:spAutoFit/>
+          </a:bodyPr>
+          <a:lstStyle/>
+          <a:p>
+            <a:pPr>
+              <a:defRPr sz="900">
+                <a:solidFill>
+                  <a:srgbClr val="5A5A5A"/>
+                </a:solidFill>
+                <a:latin typeface="Calibri"/>
+              </a:defRPr>
+            </a:pPr>
+            <a:r>
+              <a:t>SRH University  ·  Prof. Dr. Adele Nasti</a:t>
+            </a:r>
+          </a:p>
+        </p:txBody>
+      </p:sp>
+      <p:sp>
+        <p:nvSpPr>
+          <p:cNvPr id="10" name="TextBox 9"/>
+          <p:cNvSpPr txBox="1"/>
+          <p:nvPr/>
+        </p:nvSpPr>
+        <p:spPr>
+          <a:xfrm>
+            <a:off x="11064240" y="6473952"/>
+            <a:ext cx="548640" cy="274320"/>
+          </a:xfrm>
+          <a:prstGeom prst="rect">
+            <a:avLst/>
+          </a:prstGeom>
+          <a:noFill/>
+        </p:spPr>
+        <p:txBody>
+          <a:bodyPr wrap="none">
+            <a:spAutoFit/>
+          </a:bodyPr>
+          <a:lstStyle/>
+          <a:p>
+            <a:pPr algn="r">
+              <a:defRPr sz="900">
+                <a:solidFill>
+                  <a:srgbClr val="5A5A5A"/>
+                </a:solidFill>
+                <a:latin typeface="Calibri"/>
+              </a:defRPr>
+            </a:pPr>
+            <a:r>
+              <a:t>10</a:t>
+            </a:r>
+          </a:p>
+        </p:txBody>
+      </p:sp>
     </p:spTree>
   </p:cSld>
   <p:clrMapOvr>
@@ -3303,13 +3747,13 @@
         <p:spPr>
           <a:xfrm>
             <a:off x="0" y="0"/>
-            <a:ext cx="12191695" cy="6858000"/>
+            <a:ext cx="12191695" cy="1097280"/>
           </a:xfrm>
           <a:prstGeom prst="rect">
             <a:avLst/>
           </a:prstGeom>
           <a:solidFill>
-            <a:srgbClr val="FFFFFF"/>
+            <a:srgbClr val="DF4707"/>
           </a:solidFill>
           <a:ln>
             <a:noFill/>
@@ -3353,17 +3797,132 @@
         </p:blipFill>
         <p:spPr>
           <a:xfrm>
-            <a:off x="10698480" y="256032"/>
-            <a:ext cx="864108" cy="384048"/>
+            <a:off x="10835640" y="256032"/>
+            <a:ext cx="1131570" cy="502920"/>
           </a:xfrm>
           <a:prstGeom prst="rect">
             <a:avLst/>
           </a:prstGeom>
         </p:spPr>
       </p:pic>
+      <p:sp>
+        <p:nvSpPr>
+          <p:cNvPr id="4" name="TextBox 3"/>
+          <p:cNvSpPr txBox="1"/>
+          <p:nvPr/>
+        </p:nvSpPr>
+        <p:spPr>
+          <a:xfrm>
+            <a:off x="685800" y="201168"/>
+            <a:ext cx="9601200" cy="502920"/>
+          </a:xfrm>
+          <a:prstGeom prst="rect">
+            <a:avLst/>
+          </a:prstGeom>
+          <a:noFill/>
+        </p:spPr>
+        <p:txBody>
+          <a:bodyPr wrap="none">
+            <a:spAutoFit/>
+          </a:bodyPr>
+          <a:lstStyle/>
+          <a:p>
+            <a:pPr>
+              <a:defRPr sz="3000" b="1">
+                <a:solidFill>
+                  <a:srgbClr val="FFFFFF"/>
+                </a:solidFill>
+                <a:latin typeface="Calibri"/>
+              </a:defRPr>
+            </a:pPr>
+            <a:r>
+              <a:t>10 · HEEDS Mapping</a:t>
+            </a:r>
+          </a:p>
+        </p:txBody>
+      </p:sp>
+      <p:sp>
+        <p:nvSpPr>
+          <p:cNvPr id="5" name="TextBox 4"/>
+          <p:cNvSpPr txBox="1"/>
+          <p:nvPr/>
+        </p:nvSpPr>
+        <p:spPr>
+          <a:xfrm>
+            <a:off x="685800" y="713232"/>
+            <a:ext cx="9601200" cy="320040"/>
+          </a:xfrm>
+          <a:prstGeom prst="rect">
+            <a:avLst/>
+          </a:prstGeom>
+          <a:noFill/>
+        </p:spPr>
+        <p:txBody>
+          <a:bodyPr wrap="none">
+            <a:spAutoFit/>
+          </a:bodyPr>
+          <a:lstStyle/>
+          <a:p>
+            <a:pPr>
+              <a:defRPr sz="1500">
+                <a:solidFill>
+                  <a:srgbClr val="FDD9C9"/>
+                </a:solidFill>
+                <a:latin typeface="Calibri"/>
+              </a:defRPr>
+            </a:pPr>
+            <a:r>
+              <a:t>Coil Spring DoE ≡ Antenna factorial study</a:t>
+            </a:r>
+          </a:p>
+        </p:txBody>
+      </p:sp>
+      <p:sp>
+        <p:nvSpPr>
+          <p:cNvPr id="6" name="Rectangle 5"/>
+          <p:cNvSpPr/>
+          <p:nvPr/>
+        </p:nvSpPr>
+        <p:spPr>
+          <a:xfrm>
+            <a:off x="0" y="1097280"/>
+            <a:ext cx="12191695" cy="5760720"/>
+          </a:xfrm>
+          <a:prstGeom prst="rect">
+            <a:avLst/>
+          </a:prstGeom>
+          <a:solidFill>
+            <a:srgbClr val="FFFFFF"/>
+          </a:solidFill>
+          <a:ln>
+            <a:noFill/>
+          </a:ln>
+        </p:spPr>
+        <p:style>
+          <a:lnRef idx="1">
+            <a:schemeClr val="accent1"/>
+          </a:lnRef>
+          <a:fillRef idx="3">
+            <a:schemeClr val="accent1"/>
+          </a:fillRef>
+          <a:effectRef idx="2">
+            <a:schemeClr val="accent1"/>
+          </a:effectRef>
+          <a:fontRef idx="minor">
+            <a:schemeClr val="lt1"/>
+          </a:fontRef>
+        </p:style>
+        <p:txBody>
+          <a:bodyPr rtlCol="0" anchor="ctr"/>
+          <a:lstStyle/>
+          <a:p>
+            <a:pPr algn="ctr"/>
+          </a:p>
+        </p:txBody>
+      </p:sp>
       <p:pic>
         <p:nvPicPr>
-          <p:cNvPr id="4" name="Picture 3" descr="05_doe_heatmap.png"/>
+          <p:cNvPr id="7" name="Picture 6" descr="viz_heeds_map.png"/>
           <p:cNvPicPr>
             <a:picLocks noChangeAspect="1"/>
           </p:cNvPicPr>
@@ -3377,8 +3936,8 @@
         </p:blipFill>
         <p:spPr>
           <a:xfrm>
-            <a:off x="365760" y="777240"/>
-            <a:ext cx="11430000" cy="7314403"/>
+            <a:off x="881402" y="1417320"/>
+            <a:ext cx="10428889" cy="4800600"/>
           </a:xfrm>
           <a:prstGeom prst="rect">
             <a:avLst/>
@@ -3387,14 +3946,14 @@
       </p:pic>
       <p:sp>
         <p:nvSpPr>
-          <p:cNvPr id="5" name="TextBox 4"/>
+          <p:cNvPr id="8" name="TextBox 7"/>
           <p:cNvSpPr txBox="1"/>
           <p:nvPr/>
         </p:nvSpPr>
         <p:spPr>
           <a:xfrm>
-            <a:off x="502920" y="320040"/>
-            <a:ext cx="10058400" cy="411480"/>
+            <a:off x="685800" y="6473952"/>
+            <a:ext cx="9144000" cy="274320"/>
           </a:xfrm>
           <a:prstGeom prst="rect">
             <a:avLst/>
@@ -3408,29 +3967,29 @@
           <a:lstStyle/>
           <a:p>
             <a:pPr>
-              <a:defRPr sz="1800" b="1">
-                <a:solidFill>
-                  <a:srgbClr val="2D2D2D"/>
-                </a:solidFill>
-                <a:latin typeface="Calibri"/>
-              </a:defRPr>
-            </a:pPr>
-            <a:r>
-              <a:t>Full factorial DoE — 4 wind × 10 temp = 40 runs</a:t>
-            </a:r>
-          </a:p>
-        </p:txBody>
-      </p:sp>
-      <p:sp>
-        <p:nvSpPr>
-          <p:cNvPr id="6" name="TextBox 5"/>
+              <a:defRPr sz="900">
+                <a:solidFill>
+                  <a:srgbClr val="5A5A5A"/>
+                </a:solidFill>
+                <a:latin typeface="Calibri"/>
+              </a:defRPr>
+            </a:pPr>
+            <a:r>
+              <a:t>SRH University  ·  Prof. Dr. Adele Nasti</a:t>
+            </a:r>
+          </a:p>
+        </p:txBody>
+      </p:sp>
+      <p:sp>
+        <p:nvSpPr>
+          <p:cNvPr id="9" name="TextBox 8"/>
           <p:cNvSpPr txBox="1"/>
           <p:nvPr/>
         </p:nvSpPr>
         <p:spPr>
           <a:xfrm>
-            <a:off x="411480" y="6446520"/>
-            <a:ext cx="7315200" cy="320040"/>
+            <a:off x="11064240" y="6473952"/>
+            <a:ext cx="548640" cy="274320"/>
           </a:xfrm>
           <a:prstGeom prst="rect">
             <a:avLst/>
@@ -3443,46 +4002,10 @@
           </a:bodyPr>
           <a:lstStyle/>
           <a:p>
-            <a:pPr>
-              <a:defRPr sz="900">
-                <a:solidFill>
-                  <a:srgbClr val="666666"/>
-                </a:solidFill>
-                <a:latin typeface="Calibri"/>
-              </a:defRPr>
-            </a:pPr>
-            <a:r>
-              <a:t>SRH University  ·  Prof. Dr. Adele Nasti</a:t>
-            </a:r>
-          </a:p>
-        </p:txBody>
-      </p:sp>
-      <p:sp>
-        <p:nvSpPr>
-          <p:cNvPr id="7" name="TextBox 6"/>
-          <p:cNvSpPr txBox="1"/>
-          <p:nvPr/>
-        </p:nvSpPr>
-        <p:spPr>
-          <a:xfrm>
-            <a:off x="11155680" y="6446520"/>
-            <a:ext cx="731520" cy="320040"/>
-          </a:xfrm>
-          <a:prstGeom prst="rect">
-            <a:avLst/>
-          </a:prstGeom>
-          <a:noFill/>
-        </p:spPr>
-        <p:txBody>
-          <a:bodyPr wrap="none">
-            <a:spAutoFit/>
-          </a:bodyPr>
-          <a:lstStyle/>
-          <a:p>
             <a:pPr algn="r">
               <a:defRPr sz="900">
                 <a:solidFill>
-                  <a:srgbClr val="666666"/>
+                  <a:srgbClr val="5A5A5A"/>
                 </a:solidFill>
                 <a:latin typeface="Calibri"/>
               </a:defRPr>
@@ -3520,13 +4043,13 @@
         <p:spPr>
           <a:xfrm>
             <a:off x="0" y="0"/>
-            <a:ext cx="12191695" cy="6858000"/>
+            <a:ext cx="12191695" cy="1097280"/>
           </a:xfrm>
           <a:prstGeom prst="rect">
             <a:avLst/>
           </a:prstGeom>
           <a:solidFill>
-            <a:srgbClr val="FFFFFF"/>
+            <a:srgbClr val="DF4707"/>
           </a:solidFill>
           <a:ln>
             <a:noFill/>
@@ -3570,17 +4093,132 @@
         </p:blipFill>
         <p:spPr>
           <a:xfrm>
-            <a:off x="10698480" y="256032"/>
-            <a:ext cx="864108" cy="384048"/>
+            <a:off x="10835640" y="256032"/>
+            <a:ext cx="1131570" cy="502920"/>
           </a:xfrm>
           <a:prstGeom prst="rect">
             <a:avLst/>
           </a:prstGeom>
         </p:spPr>
       </p:pic>
+      <p:sp>
+        <p:nvSpPr>
+          <p:cNvPr id="4" name="TextBox 3"/>
+          <p:cNvSpPr txBox="1"/>
+          <p:nvPr/>
+        </p:nvSpPr>
+        <p:spPr>
+          <a:xfrm>
+            <a:off x="685800" y="201168"/>
+            <a:ext cx="9601200" cy="502920"/>
+          </a:xfrm>
+          <a:prstGeom prst="rect">
+            <a:avLst/>
+          </a:prstGeom>
+          <a:noFill/>
+        </p:spPr>
+        <p:txBody>
+          <a:bodyPr wrap="none">
+            <a:spAutoFit/>
+          </a:bodyPr>
+          <a:lstStyle/>
+          <a:p>
+            <a:pPr>
+              <a:defRPr sz="3000" b="1">
+                <a:solidFill>
+                  <a:srgbClr val="FFFFFF"/>
+                </a:solidFill>
+                <a:latin typeface="Calibri"/>
+              </a:defRPr>
+            </a:pPr>
+            <a:r>
+              <a:t>11 · Key Results</a:t>
+            </a:r>
+          </a:p>
+        </p:txBody>
+      </p:sp>
+      <p:sp>
+        <p:nvSpPr>
+          <p:cNvPr id="5" name="TextBox 4"/>
+          <p:cNvSpPr txBox="1"/>
+          <p:nvPr/>
+        </p:nvSpPr>
+        <p:spPr>
+          <a:xfrm>
+            <a:off x="685800" y="713232"/>
+            <a:ext cx="9601200" cy="320040"/>
+          </a:xfrm>
+          <a:prstGeom prst="rect">
+            <a:avLst/>
+          </a:prstGeom>
+          <a:noFill/>
+        </p:spPr>
+        <p:txBody>
+          <a:bodyPr wrap="none">
+            <a:spAutoFit/>
+          </a:bodyPr>
+          <a:lstStyle/>
+          <a:p>
+            <a:pPr>
+              <a:defRPr sz="1500">
+                <a:solidFill>
+                  <a:srgbClr val="FDD9C9"/>
+                </a:solidFill>
+                <a:latin typeface="Calibri"/>
+              </a:defRPr>
+            </a:pPr>
+            <a:r>
+              <a:t>Predictive maintenance value · TRL 4–5</a:t>
+            </a:r>
+          </a:p>
+        </p:txBody>
+      </p:sp>
+      <p:sp>
+        <p:nvSpPr>
+          <p:cNvPr id="6" name="Rectangle 5"/>
+          <p:cNvSpPr/>
+          <p:nvPr/>
+        </p:nvSpPr>
+        <p:spPr>
+          <a:xfrm>
+            <a:off x="0" y="1097280"/>
+            <a:ext cx="12191695" cy="5760720"/>
+          </a:xfrm>
+          <a:prstGeom prst="rect">
+            <a:avLst/>
+          </a:prstGeom>
+          <a:solidFill>
+            <a:srgbClr val="FFFFFF"/>
+          </a:solidFill>
+          <a:ln>
+            <a:noFill/>
+          </a:ln>
+        </p:spPr>
+        <p:style>
+          <a:lnRef idx="1">
+            <a:schemeClr val="accent1"/>
+          </a:lnRef>
+          <a:fillRef idx="3">
+            <a:schemeClr val="accent1"/>
+          </a:fillRef>
+          <a:effectRef idx="2">
+            <a:schemeClr val="accent1"/>
+          </a:effectRef>
+          <a:fontRef idx="minor">
+            <a:schemeClr val="lt1"/>
+          </a:fontRef>
+        </p:style>
+        <p:txBody>
+          <a:bodyPr rtlCol="0" anchor="ctr"/>
+          <a:lstStyle/>
+          <a:p>
+            <a:pPr algn="ctr"/>
+          </a:p>
+        </p:txBody>
+      </p:sp>
       <p:pic>
         <p:nvPicPr>
-          <p:cNvPr id="4" name="Picture 3" descr="01_rul_curves.png"/>
+          <p:cNvPr id="7" name="Picture 6" descr="viz_key_results.png"/>
           <p:cNvPicPr>
             <a:picLocks noChangeAspect="1"/>
           </p:cNvPicPr>
@@ -3594,8 +4232,8 @@
         </p:blipFill>
         <p:spPr>
           <a:xfrm>
-            <a:off x="365760" y="777240"/>
-            <a:ext cx="11430000" cy="6302363"/>
+            <a:off x="685800" y="1417320"/>
+            <a:ext cx="10820095" cy="3898148"/>
           </a:xfrm>
           <a:prstGeom prst="rect">
             <a:avLst/>
@@ -3604,14 +4242,14 @@
       </p:pic>
       <p:sp>
         <p:nvSpPr>
-          <p:cNvPr id="5" name="TextBox 4"/>
+          <p:cNvPr id="8" name="TextBox 7"/>
           <p:cNvSpPr txBox="1"/>
           <p:nvPr/>
         </p:nvSpPr>
         <p:spPr>
           <a:xfrm>
-            <a:off x="502920" y="320040"/>
-            <a:ext cx="10058400" cy="411480"/>
+            <a:off x="685800" y="6473952"/>
+            <a:ext cx="9144000" cy="274320"/>
           </a:xfrm>
           <a:prstGeom prst="rect">
             <a:avLst/>
@@ -3625,29 +4263,29 @@
           <a:lstStyle/>
           <a:p>
             <a:pPr>
-              <a:defRPr sz="1800" b="1">
-                <a:solidFill>
-                  <a:srgbClr val="2D2D2D"/>
-                </a:solidFill>
-                <a:latin typeface="Calibri"/>
-              </a:defRPr>
-            </a:pPr>
-            <a:r>
-              <a:t>RUL vs temperature at each wind level</a:t>
-            </a:r>
-          </a:p>
-        </p:txBody>
-      </p:sp>
-      <p:sp>
-        <p:nvSpPr>
-          <p:cNvPr id="6" name="TextBox 5"/>
+              <a:defRPr sz="900">
+                <a:solidFill>
+                  <a:srgbClr val="5A5A5A"/>
+                </a:solidFill>
+                <a:latin typeface="Calibri"/>
+              </a:defRPr>
+            </a:pPr>
+            <a:r>
+              <a:t>SRH University  ·  Prof. Dr. Adele Nasti</a:t>
+            </a:r>
+          </a:p>
+        </p:txBody>
+      </p:sp>
+      <p:sp>
+        <p:nvSpPr>
+          <p:cNvPr id="9" name="TextBox 8"/>
           <p:cNvSpPr txBox="1"/>
           <p:nvPr/>
         </p:nvSpPr>
         <p:spPr>
           <a:xfrm>
-            <a:off x="411480" y="6446520"/>
-            <a:ext cx="7315200" cy="320040"/>
+            <a:off x="11064240" y="6473952"/>
+            <a:ext cx="548640" cy="274320"/>
           </a:xfrm>
           <a:prstGeom prst="rect">
             <a:avLst/>
@@ -3660,46 +4298,10 @@
           </a:bodyPr>
           <a:lstStyle/>
           <a:p>
-            <a:pPr>
-              <a:defRPr sz="900">
-                <a:solidFill>
-                  <a:srgbClr val="666666"/>
-                </a:solidFill>
-                <a:latin typeface="Calibri"/>
-              </a:defRPr>
-            </a:pPr>
-            <a:r>
-              <a:t>SRH University  ·  Prof. Dr. Adele Nasti</a:t>
-            </a:r>
-          </a:p>
-        </p:txBody>
-      </p:sp>
-      <p:sp>
-        <p:nvSpPr>
-          <p:cNvPr id="7" name="TextBox 6"/>
-          <p:cNvSpPr txBox="1"/>
-          <p:nvPr/>
-        </p:nvSpPr>
-        <p:spPr>
-          <a:xfrm>
-            <a:off x="11155680" y="6446520"/>
-            <a:ext cx="731520" cy="320040"/>
-          </a:xfrm>
-          <a:prstGeom prst="rect">
-            <a:avLst/>
-          </a:prstGeom>
-          <a:noFill/>
-        </p:spPr>
-        <p:txBody>
-          <a:bodyPr wrap="none">
-            <a:spAutoFit/>
-          </a:bodyPr>
-          <a:lstStyle/>
-          <a:p>
             <a:pPr algn="r">
               <a:defRPr sz="900">
                 <a:solidFill>
-                  <a:srgbClr val="666666"/>
+                  <a:srgbClr val="5A5A5A"/>
                 </a:solidFill>
                 <a:latin typeface="Calibri"/>
               </a:defRPr>
@@ -3737,13 +4339,13 @@
         <p:spPr>
           <a:xfrm>
             <a:off x="0" y="0"/>
-            <a:ext cx="12191695" cy="6858000"/>
+            <a:ext cx="12191695" cy="1097280"/>
           </a:xfrm>
           <a:prstGeom prst="rect">
             <a:avLst/>
           </a:prstGeom>
           <a:solidFill>
-            <a:srgbClr val="FFFFFF"/>
+            <a:srgbClr val="DF4707"/>
           </a:solidFill>
           <a:ln>
             <a:noFill/>
@@ -3787,17 +4389,228 @@
         </p:blipFill>
         <p:spPr>
           <a:xfrm>
-            <a:off x="10698480" y="256032"/>
-            <a:ext cx="864108" cy="384048"/>
+            <a:off x="10835640" y="256032"/>
+            <a:ext cx="1131570" cy="502920"/>
           </a:xfrm>
           <a:prstGeom prst="rect">
             <a:avLst/>
           </a:prstGeom>
         </p:spPr>
       </p:pic>
+      <p:sp>
+        <p:nvSpPr>
+          <p:cNvPr id="4" name="TextBox 3"/>
+          <p:cNvSpPr txBox="1"/>
+          <p:nvPr/>
+        </p:nvSpPr>
+        <p:spPr>
+          <a:xfrm>
+            <a:off x="685800" y="201168"/>
+            <a:ext cx="9601200" cy="502920"/>
+          </a:xfrm>
+          <a:prstGeom prst="rect">
+            <a:avLst/>
+          </a:prstGeom>
+          <a:noFill/>
+        </p:spPr>
+        <p:txBody>
+          <a:bodyPr wrap="none">
+            <a:spAutoFit/>
+          </a:bodyPr>
+          <a:lstStyle/>
+          <a:p>
+            <a:pPr>
+              <a:defRPr sz="3000" b="1">
+                <a:solidFill>
+                  <a:srgbClr val="FFFFFF"/>
+                </a:solidFill>
+                <a:latin typeface="Calibri"/>
+              </a:defRPr>
+            </a:pPr>
+            <a:r>
+              <a:t>12 · Verification &amp; Validation</a:t>
+            </a:r>
+          </a:p>
+        </p:txBody>
+      </p:sp>
+      <p:sp>
+        <p:nvSpPr>
+          <p:cNvPr id="5" name="Rectangle 4"/>
+          <p:cNvSpPr/>
+          <p:nvPr/>
+        </p:nvSpPr>
+        <p:spPr>
+          <a:xfrm>
+            <a:off x="0" y="1097280"/>
+            <a:ext cx="12191695" cy="5760720"/>
+          </a:xfrm>
+          <a:prstGeom prst="rect">
+            <a:avLst/>
+          </a:prstGeom>
+          <a:solidFill>
+            <a:srgbClr val="FFFFFF"/>
+          </a:solidFill>
+          <a:ln>
+            <a:noFill/>
+          </a:ln>
+        </p:spPr>
+        <p:style>
+          <a:lnRef idx="1">
+            <a:schemeClr val="accent1"/>
+          </a:lnRef>
+          <a:fillRef idx="3">
+            <a:schemeClr val="accent1"/>
+          </a:fillRef>
+          <a:effectRef idx="2">
+            <a:schemeClr val="accent1"/>
+          </a:effectRef>
+          <a:fontRef idx="minor">
+            <a:schemeClr val="lt1"/>
+          </a:fontRef>
+        </p:style>
+        <p:txBody>
+          <a:bodyPr rtlCol="0" anchor="ctr"/>
+          <a:lstStyle/>
+          <a:p>
+            <a:pPr algn="ctr"/>
+          </a:p>
+        </p:txBody>
+      </p:sp>
+      <p:sp>
+        <p:nvSpPr>
+          <p:cNvPr id="6" name="TextBox 5"/>
+          <p:cNvSpPr txBox="1"/>
+          <p:nvPr/>
+        </p:nvSpPr>
+        <p:spPr>
+          <a:xfrm>
+            <a:off x="685800" y="1325880"/>
+            <a:ext cx="5120640" cy="4937760"/>
+          </a:xfrm>
+          <a:prstGeom prst="rect">
+            <a:avLst/>
+          </a:prstGeom>
+          <a:noFill/>
+        </p:spPr>
+        <p:txBody>
+          <a:bodyPr wrap="square" anchor="t">
+            <a:spAutoFit/>
+          </a:bodyPr>
+          <a:lstStyle/>
+          <a:p>
+            <a:pPr>
+              <a:lnSpc>
+                <a:spcPct val="125000"/>
+              </a:lnSpc>
+              <a:spcAft>
+                <a:spcPts val="1200"/>
+              </a:spcAft>
+              <a:defRPr sz="1800">
+                <a:solidFill>
+                  <a:srgbClr val="2D2D2D"/>
+                </a:solidFill>
+                <a:latin typeface="Calibri"/>
+              </a:defRPr>
+            </a:pPr>
+            <a:r>
+              <a:t>Verification — maths right?</a:t>
+            </a:r>
+          </a:p>
+          <a:p>
+            <a:pPr>
+              <a:lnSpc>
+                <a:spcPct val="125000"/>
+              </a:lnSpc>
+              <a:spcAft>
+                <a:spcPts val="1200"/>
+              </a:spcAft>
+              <a:defRPr sz="1800">
+                <a:solidFill>
+                  <a:srgbClr val="2D2D2D"/>
+                </a:solidFill>
+                <a:latin typeface="Calibri"/>
+              </a:defRPr>
+            </a:pPr>
+            <a:r>
+              <a:t>Sanity checks at anchor points</a:t>
+            </a:r>
+          </a:p>
+          <a:p>
+            <a:pPr>
+              <a:spcAft>
+                <a:spcPts val="600"/>
+              </a:spcAft>
+            </a:pPr>
+          </a:p>
+          <a:p>
+            <a:pPr>
+              <a:lnSpc>
+                <a:spcPct val="125000"/>
+              </a:lnSpc>
+              <a:spcAft>
+                <a:spcPts val="1200"/>
+              </a:spcAft>
+              <a:defRPr sz="1800">
+                <a:solidFill>
+                  <a:srgbClr val="2D2D2D"/>
+                </a:solidFill>
+                <a:latin typeface="Calibri"/>
+              </a:defRPr>
+            </a:pPr>
+            <a:r>
+              <a:t>Validation — right maths?</a:t>
+            </a:r>
+          </a:p>
+          <a:p>
+            <a:pPr>
+              <a:lnSpc>
+                <a:spcPct val="125000"/>
+              </a:lnSpc>
+              <a:spcAft>
+                <a:spcPts val="1200"/>
+              </a:spcAft>
+              <a:defRPr sz="1800">
+                <a:solidFill>
+                  <a:srgbClr val="2D2D2D"/>
+                </a:solidFill>
+                <a:latin typeface="Calibri"/>
+              </a:defRPr>
+            </a:pPr>
+            <a:r>
+              <a:t>Compare RUL vs field failures</a:t>
+            </a:r>
+          </a:p>
+          <a:p>
+            <a:pPr>
+              <a:spcAft>
+                <a:spcPts val="600"/>
+              </a:spcAft>
+            </a:pPr>
+          </a:p>
+          <a:p>
+            <a:pPr>
+              <a:lnSpc>
+                <a:spcPct val="125000"/>
+              </a:lnSpc>
+              <a:spcAft>
+                <a:spcPts val="1200"/>
+              </a:spcAft>
+              <a:defRPr sz="1800">
+                <a:solidFill>
+                  <a:srgbClr val="2D2D2D"/>
+                </a:solidFill>
+                <a:latin typeface="Calibri"/>
+              </a:defRPr>
+            </a:pPr>
+            <a:r>
+              <a:t>Calibration ≠ validation</a:t>
+            </a:r>
+          </a:p>
+        </p:txBody>
+      </p:sp>
       <p:pic>
         <p:nvPicPr>
-          <p:cNvPr id="4" name="Picture 3" descr="03_pareto_sensitivity.png"/>
+          <p:cNvPr id="7" name="Picture 6" descr="viz_vv.png"/>
           <p:cNvPicPr>
             <a:picLocks noChangeAspect="1"/>
           </p:cNvPicPr>
@@ -3811,8 +4624,8 @@
         </p:blipFill>
         <p:spPr>
           <a:xfrm>
-            <a:off x="365760" y="777240"/>
-            <a:ext cx="11430000" cy="6302363"/>
+            <a:off x="6263640" y="1325880"/>
+            <a:ext cx="5669280" cy="3054697"/>
           </a:xfrm>
           <a:prstGeom prst="rect">
             <a:avLst/>
@@ -3821,14 +4634,14 @@
       </p:pic>
       <p:sp>
         <p:nvSpPr>
-          <p:cNvPr id="5" name="TextBox 4"/>
+          <p:cNvPr id="8" name="TextBox 7"/>
           <p:cNvSpPr txBox="1"/>
           <p:nvPr/>
         </p:nvSpPr>
         <p:spPr>
           <a:xfrm>
-            <a:off x="502920" y="320040"/>
-            <a:ext cx="10058400" cy="411480"/>
+            <a:off x="685800" y="6473952"/>
+            <a:ext cx="9144000" cy="274320"/>
           </a:xfrm>
           <a:prstGeom prst="rect">
             <a:avLst/>
@@ -3842,29 +4655,29 @@
           <a:lstStyle/>
           <a:p>
             <a:pPr>
-              <a:defRPr sz="1800" b="1">
-                <a:solidFill>
-                  <a:srgbClr val="2D2D2D"/>
-                </a:solidFill>
-                <a:latin typeface="Calibri"/>
-              </a:defRPr>
-            </a:pPr>
-            <a:r>
-              <a:t>Sensitivity — wind dominates ~3.5× temperature</a:t>
-            </a:r>
-          </a:p>
-        </p:txBody>
-      </p:sp>
-      <p:sp>
-        <p:nvSpPr>
-          <p:cNvPr id="6" name="TextBox 5"/>
+              <a:defRPr sz="900">
+                <a:solidFill>
+                  <a:srgbClr val="5A5A5A"/>
+                </a:solidFill>
+                <a:latin typeface="Calibri"/>
+              </a:defRPr>
+            </a:pPr>
+            <a:r>
+              <a:t>SRH University  ·  Prof. Dr. Adele Nasti</a:t>
+            </a:r>
+          </a:p>
+        </p:txBody>
+      </p:sp>
+      <p:sp>
+        <p:nvSpPr>
+          <p:cNvPr id="9" name="TextBox 8"/>
           <p:cNvSpPr txBox="1"/>
           <p:nvPr/>
         </p:nvSpPr>
         <p:spPr>
           <a:xfrm>
-            <a:off x="411480" y="6446520"/>
-            <a:ext cx="7315200" cy="320040"/>
+            <a:off x="11064240" y="6473952"/>
+            <a:ext cx="548640" cy="274320"/>
           </a:xfrm>
           <a:prstGeom prst="rect">
             <a:avLst/>
@@ -3877,46 +4690,10 @@
           </a:bodyPr>
           <a:lstStyle/>
           <a:p>
-            <a:pPr>
-              <a:defRPr sz="900">
-                <a:solidFill>
-                  <a:srgbClr val="666666"/>
-                </a:solidFill>
-                <a:latin typeface="Calibri"/>
-              </a:defRPr>
-            </a:pPr>
-            <a:r>
-              <a:t>SRH University  ·  Prof. Dr. Adele Nasti</a:t>
-            </a:r>
-          </a:p>
-        </p:txBody>
-      </p:sp>
-      <p:sp>
-        <p:nvSpPr>
-          <p:cNvPr id="7" name="TextBox 6"/>
-          <p:cNvSpPr txBox="1"/>
-          <p:nvPr/>
-        </p:nvSpPr>
-        <p:spPr>
-          <a:xfrm>
-            <a:off x="11155680" y="6446520"/>
-            <a:ext cx="731520" cy="320040"/>
-          </a:xfrm>
-          <a:prstGeom prst="rect">
-            <a:avLst/>
-          </a:prstGeom>
-          <a:noFill/>
-        </p:spPr>
-        <p:txBody>
-          <a:bodyPr wrap="none">
-            <a:spAutoFit/>
-          </a:bodyPr>
-          <a:lstStyle/>
-          <a:p>
             <a:pPr algn="r">
               <a:defRPr sz="900">
                 <a:solidFill>
-                  <a:srgbClr val="666666"/>
+                  <a:srgbClr val="5A5A5A"/>
                 </a:solidFill>
                 <a:latin typeface="Calibri"/>
               </a:defRPr>
@@ -3954,13 +4731,13 @@
         <p:spPr>
           <a:xfrm>
             <a:off x="0" y="0"/>
-            <a:ext cx="12191695" cy="6858000"/>
+            <a:ext cx="12191695" cy="1097280"/>
           </a:xfrm>
           <a:prstGeom prst="rect">
             <a:avLst/>
           </a:prstGeom>
           <a:solidFill>
-            <a:srgbClr val="FFFFFF"/>
+            <a:srgbClr val="DF4707"/>
           </a:solidFill>
           <a:ln>
             <a:noFill/>
@@ -4004,48 +4781,24 @@
         </p:blipFill>
         <p:spPr>
           <a:xfrm>
-            <a:off x="10698480" y="256032"/>
-            <a:ext cx="864108" cy="384048"/>
+            <a:off x="10835640" y="256032"/>
+            <a:ext cx="1131570" cy="502920"/>
           </a:xfrm>
           <a:prstGeom prst="rect">
             <a:avLst/>
           </a:prstGeom>
         </p:spPr>
       </p:pic>
-      <p:pic>
-        <p:nvPicPr>
-          <p:cNvPr id="4" name="Picture 3" descr="02_response_surface_3d.png"/>
-          <p:cNvPicPr>
-            <a:picLocks noChangeAspect="1"/>
-          </p:cNvPicPr>
-          <p:nvPr/>
-        </p:nvPicPr>
-        <p:blipFill>
-          <a:blip r:embed="rId3"/>
-          <a:stretch>
-            <a:fillRect/>
-          </a:stretch>
-        </p:blipFill>
-        <p:spPr>
-          <a:xfrm>
-            <a:off x="365760" y="777240"/>
-            <a:ext cx="11430000" cy="9104905"/>
-          </a:xfrm>
-          <a:prstGeom prst="rect">
-            <a:avLst/>
-          </a:prstGeom>
-        </p:spPr>
-      </p:pic>
-      <p:sp>
-        <p:nvSpPr>
-          <p:cNvPr id="5" name="TextBox 4"/>
+      <p:sp>
+        <p:nvSpPr>
+          <p:cNvPr id="4" name="TextBox 3"/>
           <p:cNvSpPr txBox="1"/>
           <p:nvPr/>
         </p:nvSpPr>
         <p:spPr>
           <a:xfrm>
-            <a:off x="502920" y="320040"/>
-            <a:ext cx="10058400" cy="411480"/>
+            <a:off x="685800" y="201168"/>
+            <a:ext cx="9601200" cy="502920"/>
           </a:xfrm>
           <a:prstGeom prst="rect">
             <a:avLst/>
@@ -4059,29 +4812,29 @@
           <a:lstStyle/>
           <a:p>
             <a:pPr>
-              <a:defRPr sz="1800" b="1">
-                <a:solidFill>
-                  <a:srgbClr val="2D2D2D"/>
-                </a:solidFill>
-                <a:latin typeface="Calibri"/>
-              </a:defRPr>
-            </a:pPr>
-            <a:r>
-              <a:t>DoE response surface across design space</a:t>
-            </a:r>
-          </a:p>
-        </p:txBody>
-      </p:sp>
-      <p:sp>
-        <p:nvSpPr>
-          <p:cNvPr id="6" name="TextBox 5"/>
+              <a:defRPr sz="3000" b="1">
+                <a:solidFill>
+                  <a:srgbClr val="FFFFFF"/>
+                </a:solidFill>
+                <a:latin typeface="Calibri"/>
+              </a:defRPr>
+            </a:pPr>
+            <a:r>
+              <a:t>13 · Live Demo &amp; Value</a:t>
+            </a:r>
+          </a:p>
+        </p:txBody>
+      </p:sp>
+      <p:sp>
+        <p:nvSpPr>
+          <p:cNvPr id="5" name="TextBox 4"/>
           <p:cNvSpPr txBox="1"/>
           <p:nvPr/>
         </p:nvSpPr>
         <p:spPr>
           <a:xfrm>
-            <a:off x="411480" y="6446520"/>
-            <a:ext cx="7315200" cy="320040"/>
+            <a:off x="685800" y="713232"/>
+            <a:ext cx="9601200" cy="320040"/>
           </a:xfrm>
           <a:prstGeom prst="rect">
             <a:avLst/>
@@ -4095,16 +4848,59 @@
           <a:lstStyle/>
           <a:p>
             <a:pPr>
-              <a:defRPr sz="900">
-                <a:solidFill>
-                  <a:srgbClr val="666666"/>
-                </a:solidFill>
-                <a:latin typeface="Calibri"/>
-              </a:defRPr>
-            </a:pPr>
-            <a:r>
-              <a:t>SRH University  ·  Prof. Dr. Adele Nasti</a:t>
-            </a:r>
+              <a:defRPr sz="1500">
+                <a:solidFill>
+                  <a:srgbClr val="FDD9C9"/>
+                </a:solidFill>
+                <a:latin typeface="Calibri"/>
+              </a:defRPr>
+            </a:pPr>
+            <a:r>
+              <a:t>Reproducible Python pipeline</a:t>
+            </a:r>
+          </a:p>
+        </p:txBody>
+      </p:sp>
+      <p:sp>
+        <p:nvSpPr>
+          <p:cNvPr id="6" name="Rectangle 5"/>
+          <p:cNvSpPr/>
+          <p:nvPr/>
+        </p:nvSpPr>
+        <p:spPr>
+          <a:xfrm>
+            <a:off x="0" y="1097280"/>
+            <a:ext cx="12191695" cy="5760720"/>
+          </a:xfrm>
+          <a:prstGeom prst="rect">
+            <a:avLst/>
+          </a:prstGeom>
+          <a:solidFill>
+            <a:srgbClr val="FFFFFF"/>
+          </a:solidFill>
+          <a:ln>
+            <a:noFill/>
+          </a:ln>
+        </p:spPr>
+        <p:style>
+          <a:lnRef idx="1">
+            <a:schemeClr val="accent1"/>
+          </a:lnRef>
+          <a:fillRef idx="3">
+            <a:schemeClr val="accent1"/>
+          </a:fillRef>
+          <a:effectRef idx="2">
+            <a:schemeClr val="accent1"/>
+          </a:effectRef>
+          <a:fontRef idx="minor">
+            <a:schemeClr val="lt1"/>
+          </a:fontRef>
+        </p:style>
+        <p:txBody>
+          <a:bodyPr rtlCol="0" anchor="ctr"/>
+          <a:lstStyle/>
+          <a:p>
+            <a:pPr algn="ctr"/>
           </a:p>
         </p:txBody>
       </p:sp>
@@ -4116,8 +4912,114 @@
         </p:nvSpPr>
         <p:spPr>
           <a:xfrm>
-            <a:off x="11155680" y="6446520"/>
-            <a:ext cx="731520" cy="320040"/>
+            <a:off x="685800" y="1325880"/>
+            <a:ext cx="10820095" cy="4937760"/>
+          </a:xfrm>
+          <a:prstGeom prst="rect">
+            <a:avLst/>
+          </a:prstGeom>
+          <a:noFill/>
+        </p:spPr>
+        <p:txBody>
+          <a:bodyPr wrap="square" anchor="t">
+            <a:spAutoFit/>
+          </a:bodyPr>
+          <a:lstStyle/>
+          <a:p>
+            <a:pPr>
+              <a:lnSpc>
+                <a:spcPct val="125000"/>
+              </a:lnSpc>
+              <a:spcAft>
+                <a:spcPts val="1400"/>
+              </a:spcAft>
+              <a:defRPr sz="2000">
+                <a:solidFill>
+                  <a:srgbClr val="2D2D2D"/>
+                </a:solidFill>
+                <a:latin typeface="Calibri"/>
+              </a:defRPr>
+            </a:pPr>
+            <a:r>
+              <a:t>Run: python project/run_project.py</a:t>
+            </a:r>
+          </a:p>
+          <a:p>
+            <a:pPr>
+              <a:lnSpc>
+                <a:spcPct val="125000"/>
+              </a:lnSpc>
+              <a:spcAft>
+                <a:spcPts val="1400"/>
+              </a:spcAft>
+              <a:defRPr sz="2000">
+                <a:solidFill>
+                  <a:srgbClr val="2D2D2D"/>
+                </a:solidFill>
+                <a:latin typeface="Calibri"/>
+              </a:defRPr>
+            </a:pPr>
+            <a:r>
+              <a:t>Notebook: DigitalTwin_Antenna_RUL.ipynb</a:t>
+            </a:r>
+          </a:p>
+          <a:p>
+            <a:pPr>
+              <a:spcAft>
+                <a:spcPts val="600"/>
+              </a:spcAft>
+            </a:pPr>
+          </a:p>
+          <a:p>
+            <a:pPr>
+              <a:lnSpc>
+                <a:spcPct val="125000"/>
+              </a:lnSpc>
+              <a:spcAft>
+                <a:spcPts val="1400"/>
+              </a:spcAft>
+              <a:defRPr sz="2000">
+                <a:solidFill>
+                  <a:srgbClr val="2D2D2D"/>
+                </a:solidFill>
+                <a:latin typeface="Calibri"/>
+              </a:defRPr>
+            </a:pPr>
+            <a:r>
+              <a:t>Value: fewer outages, safer crews, data-driven maintenance</a:t>
+            </a:r>
+          </a:p>
+          <a:p>
+            <a:pPr>
+              <a:lnSpc>
+                <a:spcPct val="125000"/>
+              </a:lnSpc>
+              <a:spcAft>
+                <a:spcPts val="1400"/>
+              </a:spcAft>
+              <a:defRPr sz="2000">
+                <a:solidFill>
+                  <a:srgbClr val="2D2D2D"/>
+                </a:solidFill>
+                <a:latin typeface="Calibri"/>
+              </a:defRPr>
+            </a:pPr>
+            <a:r>
+              <a:t>Creative: telecom-specific RUL physics + DoE envelope</a:t>
+            </a:r>
+          </a:p>
+        </p:txBody>
+      </p:sp>
+      <p:sp>
+        <p:nvSpPr>
+          <p:cNvPr id="8" name="TextBox 7"/>
+          <p:cNvSpPr txBox="1"/>
+          <p:nvPr/>
+        </p:nvSpPr>
+        <p:spPr>
+          <a:xfrm>
+            <a:off x="685800" y="6473952"/>
+            <a:ext cx="9144000" cy="274320"/>
           </a:xfrm>
           <a:prstGeom prst="rect">
             <a:avLst/>
@@ -4130,10 +5032,46 @@
           </a:bodyPr>
           <a:lstStyle/>
           <a:p>
+            <a:pPr>
+              <a:defRPr sz="900">
+                <a:solidFill>
+                  <a:srgbClr val="5A5A5A"/>
+                </a:solidFill>
+                <a:latin typeface="Calibri"/>
+              </a:defRPr>
+            </a:pPr>
+            <a:r>
+              <a:t>SRH University  ·  Prof. Dr. Adele Nasti</a:t>
+            </a:r>
+          </a:p>
+        </p:txBody>
+      </p:sp>
+      <p:sp>
+        <p:nvSpPr>
+          <p:cNvPr id="9" name="TextBox 8"/>
+          <p:cNvSpPr txBox="1"/>
+          <p:nvPr/>
+        </p:nvSpPr>
+        <p:spPr>
+          <a:xfrm>
+            <a:off x="11064240" y="6473952"/>
+            <a:ext cx="548640" cy="274320"/>
+          </a:xfrm>
+          <a:prstGeom prst="rect">
+            <a:avLst/>
+          </a:prstGeom>
+          <a:noFill/>
+        </p:spPr>
+        <p:txBody>
+          <a:bodyPr wrap="none">
+            <a:spAutoFit/>
+          </a:bodyPr>
+          <a:lstStyle/>
+          <a:p>
             <a:pPr algn="r">
               <a:defRPr sz="900">
                 <a:solidFill>
-                  <a:srgbClr val="666666"/>
+                  <a:srgbClr val="5A5A5A"/>
                 </a:solidFill>
                 <a:latin typeface="Calibri"/>
               </a:defRPr>
@@ -4171,13 +5109,13 @@
         <p:spPr>
           <a:xfrm>
             <a:off x="0" y="0"/>
-            <a:ext cx="12191695" cy="6858000"/>
+            <a:ext cx="12191695" cy="1097280"/>
           </a:xfrm>
           <a:prstGeom prst="rect">
             <a:avLst/>
           </a:prstGeom>
           <a:solidFill>
-            <a:srgbClr val="FFFFFF"/>
+            <a:srgbClr val="DF4707"/>
           </a:solidFill>
           <a:ln>
             <a:noFill/>
@@ -4221,48 +5159,24 @@
         </p:blipFill>
         <p:spPr>
           <a:xfrm>
-            <a:off x="10698480" y="256032"/>
-            <a:ext cx="864108" cy="384048"/>
+            <a:off x="10835640" y="256032"/>
+            <a:ext cx="1131570" cy="502920"/>
           </a:xfrm>
           <a:prstGeom prst="rect">
             <a:avLst/>
           </a:prstGeom>
         </p:spPr>
       </p:pic>
-      <p:pic>
-        <p:nvPicPr>
-          <p:cNvPr id="4" name="Picture 3" descr="04_operating_envelope.png"/>
-          <p:cNvPicPr>
-            <a:picLocks noChangeAspect="1"/>
-          </p:cNvPicPr>
-          <p:nvPr/>
-        </p:nvPicPr>
-        <p:blipFill>
-          <a:blip r:embed="rId3"/>
-          <a:stretch>
-            <a:fillRect/>
-          </a:stretch>
-        </p:blipFill>
-        <p:spPr>
-          <a:xfrm>
-            <a:off x="365760" y="777240"/>
-            <a:ext cx="11430000" cy="7424459"/>
-          </a:xfrm>
-          <a:prstGeom prst="rect">
-            <a:avLst/>
-          </a:prstGeom>
-        </p:spPr>
-      </p:pic>
-      <p:sp>
-        <p:nvSpPr>
-          <p:cNvPr id="5" name="TextBox 4"/>
+      <p:sp>
+        <p:nvSpPr>
+          <p:cNvPr id="4" name="TextBox 3"/>
           <p:cNvSpPr txBox="1"/>
           <p:nvPr/>
         </p:nvSpPr>
         <p:spPr>
           <a:xfrm>
-            <a:off x="502920" y="320040"/>
-            <a:ext cx="10058400" cy="411480"/>
+            <a:off x="685800" y="201168"/>
+            <a:ext cx="9601200" cy="502920"/>
           </a:xfrm>
           <a:prstGeom prst="rect">
             <a:avLst/>
@@ -4276,16 +5190,59 @@
           <a:lstStyle/>
           <a:p>
             <a:pPr>
-              <a:defRPr sz="1800" b="1">
-                <a:solidFill>
-                  <a:srgbClr val="2D2D2D"/>
-                </a:solidFill>
-                <a:latin typeface="Calibri"/>
-              </a:defRPr>
-            </a:pPr>
-            <a:r>
-              <a:t>Operating envelope — safe: wind ≤12 m/s, temp ≤30°C</a:t>
-            </a:r>
+              <a:defRPr sz="3000" b="1">
+                <a:solidFill>
+                  <a:srgbClr val="FFFFFF"/>
+                </a:solidFill>
+                <a:latin typeface="Calibri"/>
+              </a:defRPr>
+            </a:pPr>
+            <a:r>
+              <a:t>14 · References</a:t>
+            </a:r>
+          </a:p>
+        </p:txBody>
+      </p:sp>
+      <p:sp>
+        <p:nvSpPr>
+          <p:cNvPr id="5" name="Rectangle 4"/>
+          <p:cNvSpPr/>
+          <p:nvPr/>
+        </p:nvSpPr>
+        <p:spPr>
+          <a:xfrm>
+            <a:off x="0" y="1097280"/>
+            <a:ext cx="12191695" cy="5760720"/>
+          </a:xfrm>
+          <a:prstGeom prst="rect">
+            <a:avLst/>
+          </a:prstGeom>
+          <a:solidFill>
+            <a:srgbClr val="FFFFFF"/>
+          </a:solidFill>
+          <a:ln>
+            <a:noFill/>
+          </a:ln>
+        </p:spPr>
+        <p:style>
+          <a:lnRef idx="1">
+            <a:schemeClr val="accent1"/>
+          </a:lnRef>
+          <a:fillRef idx="3">
+            <a:schemeClr val="accent1"/>
+          </a:fillRef>
+          <a:effectRef idx="2">
+            <a:schemeClr val="accent1"/>
+          </a:effectRef>
+          <a:fontRef idx="minor">
+            <a:schemeClr val="lt1"/>
+          </a:fontRef>
+        </p:style>
+        <p:txBody>
+          <a:bodyPr rtlCol="0" anchor="ctr"/>
+          <a:lstStyle/>
+          <a:p>
+            <a:pPr algn="ctr"/>
           </a:p>
         </p:txBody>
       </p:sp>
@@ -4297,8 +5254,164 @@
         </p:nvSpPr>
         <p:spPr>
           <a:xfrm>
-            <a:off x="411480" y="6446520"/>
-            <a:ext cx="7315200" cy="320040"/>
+            <a:off x="685800" y="1325880"/>
+            <a:ext cx="10820095" cy="4937760"/>
+          </a:xfrm>
+          <a:prstGeom prst="rect">
+            <a:avLst/>
+          </a:prstGeom>
+          <a:noFill/>
+        </p:spPr>
+        <p:txBody>
+          <a:bodyPr wrap="square" anchor="t">
+            <a:spAutoFit/>
+          </a:bodyPr>
+          <a:lstStyle/>
+          <a:p>
+            <a:pPr>
+              <a:lnSpc>
+                <a:spcPct val="125000"/>
+              </a:lnSpc>
+              <a:spcAft>
+                <a:spcPts val="1400"/>
+              </a:spcAft>
+              <a:defRPr sz="2000">
+                <a:solidFill>
+                  <a:srgbClr val="2D2D2D"/>
+                </a:solidFill>
+                <a:latin typeface="Calibri"/>
+              </a:defRPr>
+            </a:pPr>
+            <a:r>
+              <a:t>1. AIAA (2020). Digital Twin: Definition &amp; Value</a:t>
+            </a:r>
+          </a:p>
+          <a:p>
+            <a:pPr>
+              <a:lnSpc>
+                <a:spcPct val="125000"/>
+              </a:lnSpc>
+              <a:spcAft>
+                <a:spcPts val="1400"/>
+              </a:spcAft>
+              <a:defRPr sz="2000">
+                <a:solidFill>
+                  <a:srgbClr val="2D2D2D"/>
+                </a:solidFill>
+                <a:latin typeface="Calibri"/>
+              </a:defRPr>
+            </a:pPr>
+            <a:r>
+              <a:t>2. Grieves &amp; Vickers (2017). Digital Twin: Mitigating Unpredictable Behavior</a:t>
+            </a:r>
+          </a:p>
+          <a:p>
+            <a:pPr>
+              <a:lnSpc>
+                <a:spcPct val="125000"/>
+              </a:lnSpc>
+              <a:spcAft>
+                <a:spcPts val="1400"/>
+              </a:spcAft>
+              <a:defRPr sz="2000">
+                <a:solidFill>
+                  <a:srgbClr val="2D2D2D"/>
+                </a:solidFill>
+                <a:latin typeface="Calibri"/>
+              </a:defRPr>
+            </a:pPr>
+            <a:r>
+              <a:t>3. Tao et al. (2019). Digital Twin in Industry. IEEE TII</a:t>
+            </a:r>
+          </a:p>
+          <a:p>
+            <a:pPr>
+              <a:lnSpc>
+                <a:spcPct val="125000"/>
+              </a:lnSpc>
+              <a:spcAft>
+                <a:spcPts val="1400"/>
+              </a:spcAft>
+              <a:defRPr sz="2000">
+                <a:solidFill>
+                  <a:srgbClr val="2D2D2D"/>
+                </a:solidFill>
+                <a:latin typeface="Calibri"/>
+              </a:defRPr>
+            </a:pPr>
+            <a:r>
+              <a:t>4. Montgomery (2017). Design and Analysis of Experiments</a:t>
+            </a:r>
+          </a:p>
+          <a:p>
+            <a:pPr>
+              <a:lnSpc>
+                <a:spcPct val="125000"/>
+              </a:lnSpc>
+              <a:spcAft>
+                <a:spcPts val="1400"/>
+              </a:spcAft>
+              <a:defRPr sz="2000">
+                <a:solidFill>
+                  <a:srgbClr val="2D2D2D"/>
+                </a:solidFill>
+                <a:latin typeface="Calibri"/>
+              </a:defRPr>
+            </a:pPr>
+            <a:r>
+              <a:t>5. Liu et al. (2021). UAV photogrammetry for telecom towers</a:t>
+            </a:r>
+          </a:p>
+          <a:p>
+            <a:pPr>
+              <a:lnSpc>
+                <a:spcPct val="125000"/>
+              </a:lnSpc>
+              <a:spcAft>
+                <a:spcPts val="1400"/>
+              </a:spcAft>
+              <a:defRPr sz="2000">
+                <a:solidFill>
+                  <a:srgbClr val="2D2D2D"/>
+                </a:solidFill>
+                <a:latin typeface="Calibri"/>
+              </a:defRPr>
+            </a:pPr>
+            <a:r>
+              <a:t>6. Kapteyn et al. (2021). Predictive digital twins. Nature Comp Sci</a:t>
+            </a:r>
+          </a:p>
+          <a:p>
+            <a:pPr>
+              <a:lnSpc>
+                <a:spcPct val="125000"/>
+              </a:lnSpc>
+              <a:spcAft>
+                <a:spcPts val="1400"/>
+              </a:spcAft>
+              <a:defRPr sz="2000">
+                <a:solidFill>
+                  <a:srgbClr val="2D2D2D"/>
+                </a:solidFill>
+                <a:latin typeface="Calibri"/>
+              </a:defRPr>
+            </a:pPr>
+            <a:r>
+              <a:t>7. Siemens (2024). HEEDS Multi-Disciplinary Design Exploration</a:t>
+            </a:r>
+          </a:p>
+        </p:txBody>
+      </p:sp>
+      <p:sp>
+        <p:nvSpPr>
+          <p:cNvPr id="7" name="TextBox 6"/>
+          <p:cNvSpPr txBox="1"/>
+          <p:nvPr/>
+        </p:nvSpPr>
+        <p:spPr>
+          <a:xfrm>
+            <a:off x="685800" y="6473952"/>
+            <a:ext cx="9144000" cy="274320"/>
           </a:xfrm>
           <a:prstGeom prst="rect">
             <a:avLst/>
@@ -4314,7 +5427,7 @@
             <a:pPr>
               <a:defRPr sz="900">
                 <a:solidFill>
-                  <a:srgbClr val="666666"/>
+                  <a:srgbClr val="5A5A5A"/>
                 </a:solidFill>
                 <a:latin typeface="Calibri"/>
               </a:defRPr>
@@ -4327,14 +5440,14 @@
       </p:sp>
       <p:sp>
         <p:nvSpPr>
-          <p:cNvPr id="7" name="TextBox 6"/>
+          <p:cNvPr id="8" name="TextBox 7"/>
           <p:cNvSpPr txBox="1"/>
           <p:nvPr/>
         </p:nvSpPr>
         <p:spPr>
           <a:xfrm>
-            <a:off x="11155680" y="6446520"/>
-            <a:ext cx="731520" cy="320040"/>
+            <a:off x="11064240" y="6473952"/>
+            <a:ext cx="548640" cy="274320"/>
           </a:xfrm>
           <a:prstGeom prst="rect">
             <a:avLst/>
@@ -4350,7 +5463,7 @@
             <a:pPr algn="r">
               <a:defRPr sz="900">
                 <a:solidFill>
-                  <a:srgbClr val="666666"/>
+                  <a:srgbClr val="5A5A5A"/>
                 </a:solidFill>
                 <a:latin typeface="Calibri"/>
               </a:defRPr>
@@ -4379,9 +5492,95 @@
         <p:nvPr/>
       </p:nvGrpSpPr>
       <p:grpSpPr/>
+      <p:sp>
+        <p:nvSpPr>
+          <p:cNvPr id="2" name="Rectangle 1"/>
+          <p:cNvSpPr/>
+          <p:nvPr/>
+        </p:nvSpPr>
+        <p:spPr>
+          <a:xfrm>
+            <a:off x="0" y="0"/>
+            <a:ext cx="12191695" cy="6858000"/>
+          </a:xfrm>
+          <a:prstGeom prst="rect">
+            <a:avLst/>
+          </a:prstGeom>
+          <a:solidFill>
+            <a:srgbClr val="0B1D35"/>
+          </a:solidFill>
+          <a:ln>
+            <a:noFill/>
+          </a:ln>
+        </p:spPr>
+        <p:style>
+          <a:lnRef idx="1">
+            <a:schemeClr val="accent1"/>
+          </a:lnRef>
+          <a:fillRef idx="3">
+            <a:schemeClr val="accent1"/>
+          </a:fillRef>
+          <a:effectRef idx="2">
+            <a:schemeClr val="accent1"/>
+          </a:effectRef>
+          <a:fontRef idx="minor">
+            <a:schemeClr val="lt1"/>
+          </a:fontRef>
+        </p:style>
+        <p:txBody>
+          <a:bodyPr rtlCol="0" anchor="ctr"/>
+          <a:lstStyle/>
+          <a:p>
+            <a:pPr algn="ctr"/>
+          </a:p>
+        </p:txBody>
+      </p:sp>
+      <p:sp>
+        <p:nvSpPr>
+          <p:cNvPr id="3" name="Rectangle 2"/>
+          <p:cNvSpPr/>
+          <p:nvPr/>
+        </p:nvSpPr>
+        <p:spPr>
+          <a:xfrm>
+            <a:off x="0" y="0"/>
+            <a:ext cx="12191695" cy="109728"/>
+          </a:xfrm>
+          <a:prstGeom prst="rect">
+            <a:avLst/>
+          </a:prstGeom>
+          <a:solidFill>
+            <a:srgbClr val="DF4707"/>
+          </a:solidFill>
+          <a:ln>
+            <a:noFill/>
+          </a:ln>
+        </p:spPr>
+        <p:style>
+          <a:lnRef idx="1">
+            <a:schemeClr val="accent1"/>
+          </a:lnRef>
+          <a:fillRef idx="3">
+            <a:schemeClr val="accent1"/>
+          </a:fillRef>
+          <a:effectRef idx="2">
+            <a:schemeClr val="accent1"/>
+          </a:effectRef>
+          <a:fontRef idx="minor">
+            <a:schemeClr val="lt1"/>
+          </a:fontRef>
+        </p:style>
+        <p:txBody>
+          <a:bodyPr rtlCol="0" anchor="ctr"/>
+          <a:lstStyle/>
+          <a:p>
+            <a:pPr algn="ctr"/>
+          </a:p>
+        </p:txBody>
+      </p:sp>
       <p:pic>
         <p:nvPicPr>
-          <p:cNvPr id="2" name="Picture 1" descr="section_01_problem.png"/>
+          <p:cNvPr id="4" name="Picture 3" descr="srh_logo_white.png"/>
           <p:cNvPicPr>
             <a:picLocks noChangeAspect="1"/>
           </p:cNvPicPr>
@@ -4395,133 +5594,24 @@
         </p:blipFill>
         <p:spPr>
           <a:xfrm>
-            <a:off x="0" y="0"/>
-            <a:ext cx="12191695" cy="6858000"/>
+            <a:off x="685800" y="411480"/>
+            <a:ext cx="768569" cy="594360"/>
           </a:xfrm>
           <a:prstGeom prst="rect">
             <a:avLst/>
           </a:prstGeom>
         </p:spPr>
       </p:pic>
-      <p:pic>
-        <p:nvPicPr>
-          <p:cNvPr id="3" name="Picture 2" descr="srh_logo_white.png"/>
-          <p:cNvPicPr>
-            <a:picLocks noChangeAspect="1"/>
-          </p:cNvPicPr>
-          <p:nvPr/>
-        </p:nvPicPr>
-        <p:blipFill>
-          <a:blip r:embed="rId3"/>
-          <a:stretch>
-            <a:fillRect/>
-          </a:stretch>
-        </p:blipFill>
-        <p:spPr>
-          <a:xfrm>
-            <a:off x="10972800" y="320040"/>
-            <a:ext cx="650328" cy="502920"/>
-          </a:xfrm>
-          <a:prstGeom prst="rect">
-            <a:avLst/>
-          </a:prstGeom>
-        </p:spPr>
-      </p:pic>
-    </p:spTree>
-  </p:cSld>
-  <p:clrMapOvr>
-    <a:masterClrMapping/>
-  </p:clrMapOvr>
-</p:sld>
-</file>
-
-<file path=ppt/slides/slide17.xml><?xml version="1.0" encoding="utf-8"?>
-<p:sld xmlns:a="http://schemas.openxmlformats.org/drawingml/2006/main" xmlns:p="http://schemas.openxmlformats.org/presentationml/2006/main" xmlns:r="http://schemas.openxmlformats.org/officeDocument/2006/relationships">
-  <p:cSld>
-    <p:spTree>
-      <p:nvGrpSpPr>
-        <p:cNvPr id="1" name=""/>
-        <p:cNvGrpSpPr/>
-        <p:nvPr/>
-      </p:nvGrpSpPr>
-      <p:grpSpPr/>
-      <p:sp>
-        <p:nvSpPr>
-          <p:cNvPr id="2" name="Rectangle 1"/>
-          <p:cNvSpPr/>
-          <p:nvPr/>
-        </p:nvSpPr>
-        <p:spPr>
-          <a:xfrm>
-            <a:off x="0" y="0"/>
-            <a:ext cx="12191695" cy="6858000"/>
-          </a:xfrm>
-          <a:prstGeom prst="rect">
-            <a:avLst/>
-          </a:prstGeom>
-          <a:solidFill>
-            <a:srgbClr val="FFFFFF"/>
-          </a:solidFill>
-          <a:ln>
-            <a:noFill/>
-          </a:ln>
-        </p:spPr>
-        <p:style>
-          <a:lnRef idx="1">
-            <a:schemeClr val="accent1"/>
-          </a:lnRef>
-          <a:fillRef idx="3">
-            <a:schemeClr val="accent1"/>
-          </a:fillRef>
-          <a:effectRef idx="2">
-            <a:schemeClr val="accent1"/>
-          </a:effectRef>
-          <a:fontRef idx="minor">
-            <a:schemeClr val="lt1"/>
-          </a:fontRef>
-        </p:style>
-        <p:txBody>
-          <a:bodyPr rtlCol="0" anchor="ctr"/>
-          <a:lstStyle/>
-          <a:p>
-            <a:pPr algn="ctr"/>
-          </a:p>
-        </p:txBody>
-      </p:sp>
-      <p:pic>
-        <p:nvPicPr>
-          <p:cNvPr id="3" name="Picture 2" descr="srh_logo_orange.png"/>
-          <p:cNvPicPr>
-            <a:picLocks noChangeAspect="1"/>
-          </p:cNvPicPr>
-          <p:nvPr/>
-        </p:nvPicPr>
-        <p:blipFill>
-          <a:blip r:embed="rId2"/>
-          <a:stretch>
-            <a:fillRect/>
-          </a:stretch>
-        </p:blipFill>
-        <p:spPr>
-          <a:xfrm>
-            <a:off x="10698480" y="256032"/>
-            <a:ext cx="864108" cy="384048"/>
-          </a:xfrm>
-          <a:prstGeom prst="rect">
-            <a:avLst/>
-          </a:prstGeom>
-        </p:spPr>
-      </p:pic>
-      <p:sp>
-        <p:nvSpPr>
-          <p:cNvPr id="4" name="TextBox 3"/>
+      <p:sp>
+        <p:nvSpPr>
+          <p:cNvPr id="5" name="TextBox 4"/>
           <p:cNvSpPr txBox="1"/>
           <p:nvPr/>
         </p:nvSpPr>
         <p:spPr>
           <a:xfrm>
-            <a:off x="502920" y="320040"/>
-            <a:ext cx="9144000" cy="502920"/>
+            <a:off x="685800" y="2560320"/>
+            <a:ext cx="9144000" cy="1645920"/>
           </a:xfrm>
           <a:prstGeom prst="rect">
             <a:avLst/>
@@ -4535,466 +5625,31 @@
           <a:lstStyle/>
           <a:p>
             <a:pPr>
-              <a:defRPr sz="2600" b="1">
-                <a:solidFill>
-                  <a:srgbClr val="2D2D2D"/>
-                </a:solidFill>
-                <a:latin typeface="Calibri"/>
-              </a:defRPr>
-            </a:pPr>
-            <a:r>
-              <a:t>HEEDS Workflow Mapping</a:t>
-            </a:r>
-          </a:p>
-        </p:txBody>
-      </p:sp>
-      <p:sp>
-        <p:nvSpPr>
-          <p:cNvPr id="5" name="TextBox 4"/>
-          <p:cNvSpPr txBox="1"/>
-          <p:nvPr/>
-        </p:nvSpPr>
-        <p:spPr>
-          <a:xfrm>
-            <a:off x="502920" y="868680"/>
-            <a:ext cx="9144000" cy="365760"/>
-          </a:xfrm>
-          <a:prstGeom prst="rect">
-            <a:avLst/>
-          </a:prstGeom>
-          <a:noFill/>
-        </p:spPr>
-        <p:txBody>
-          <a:bodyPr wrap="none">
-            <a:spAutoFit/>
-          </a:bodyPr>
-          <a:lstStyle/>
-          <a:p>
-            <a:pPr>
-              <a:defRPr sz="1400">
-                <a:solidFill>
-                  <a:srgbClr val="666666"/>
-                </a:solidFill>
-                <a:latin typeface="Calibri"/>
-              </a:defRPr>
-            </a:pPr>
-            <a:r>
-              <a:t>Example 4 Coil Spring DoE ≡ Antenna factorial</a:t>
-            </a:r>
-          </a:p>
-        </p:txBody>
-      </p:sp>
-      <p:pic>
-        <p:nvPicPr>
-          <p:cNvPr id="6" name="Picture 5" descr="viz_heeds_map.png"/>
-          <p:cNvPicPr>
-            <a:picLocks noChangeAspect="1"/>
-          </p:cNvPicPr>
-          <p:nvPr/>
-        </p:nvPicPr>
-        <p:blipFill>
-          <a:blip r:embed="rId3"/>
-          <a:stretch>
-            <a:fillRect/>
-          </a:stretch>
-        </p:blipFill>
-        <p:spPr>
-          <a:xfrm>
-            <a:off x="502920" y="1234440"/>
-            <a:ext cx="11155680" cy="5202070"/>
-          </a:xfrm>
-          <a:prstGeom prst="rect">
-            <a:avLst/>
-          </a:prstGeom>
-        </p:spPr>
-      </p:pic>
-      <p:sp>
-        <p:nvSpPr>
-          <p:cNvPr id="7" name="TextBox 6"/>
-          <p:cNvSpPr txBox="1"/>
-          <p:nvPr/>
-        </p:nvSpPr>
-        <p:spPr>
-          <a:xfrm>
-            <a:off x="411480" y="6446520"/>
-            <a:ext cx="7315200" cy="320040"/>
-          </a:xfrm>
-          <a:prstGeom prst="rect">
-            <a:avLst/>
-          </a:prstGeom>
-          <a:noFill/>
-        </p:spPr>
-        <p:txBody>
-          <a:bodyPr wrap="none">
-            <a:spAutoFit/>
-          </a:bodyPr>
-          <a:lstStyle/>
-          <a:p>
-            <a:pPr>
-              <a:defRPr sz="900">
-                <a:solidFill>
-                  <a:srgbClr val="666666"/>
-                </a:solidFill>
-                <a:latin typeface="Calibri"/>
-              </a:defRPr>
-            </a:pPr>
-            <a:r>
-              <a:t>SRH University  ·  Prof. Dr. Adele Nasti</a:t>
-            </a:r>
-          </a:p>
-        </p:txBody>
-      </p:sp>
-      <p:sp>
-        <p:nvSpPr>
-          <p:cNvPr id="8" name="TextBox 7"/>
-          <p:cNvSpPr txBox="1"/>
-          <p:nvPr/>
-        </p:nvSpPr>
-        <p:spPr>
-          <a:xfrm>
-            <a:off x="11155680" y="6446520"/>
-            <a:ext cx="731520" cy="320040"/>
-          </a:xfrm>
-          <a:prstGeom prst="rect">
-            <a:avLst/>
-          </a:prstGeom>
-          <a:noFill/>
-        </p:spPr>
-        <p:txBody>
-          <a:bodyPr wrap="none">
-            <a:spAutoFit/>
-          </a:bodyPr>
-          <a:lstStyle/>
-          <a:p>
-            <a:pPr algn="r">
-              <a:defRPr sz="900">
-                <a:solidFill>
-                  <a:srgbClr val="666666"/>
-                </a:solidFill>
-                <a:latin typeface="Calibri"/>
-              </a:defRPr>
-            </a:pPr>
-            <a:r>
-              <a:t>17</a:t>
-            </a:r>
-          </a:p>
-        </p:txBody>
-      </p:sp>
-    </p:spTree>
-  </p:cSld>
-  <p:clrMapOvr>
-    <a:masterClrMapping/>
-  </p:clrMapOvr>
-</p:sld>
-</file>
-
-<file path=ppt/slides/slide18.xml><?xml version="1.0" encoding="utf-8"?>
-<p:sld xmlns:a="http://schemas.openxmlformats.org/drawingml/2006/main" xmlns:p="http://schemas.openxmlformats.org/presentationml/2006/main" xmlns:r="http://schemas.openxmlformats.org/officeDocument/2006/relationships">
-  <p:cSld>
-    <p:spTree>
-      <p:nvGrpSpPr>
-        <p:cNvPr id="1" name=""/>
-        <p:cNvGrpSpPr/>
-        <p:nvPr/>
-      </p:nvGrpSpPr>
-      <p:grpSpPr/>
-      <p:pic>
-        <p:nvPicPr>
-          <p:cNvPr id="2" name="Picture 1" descr="section_01_problem.png"/>
-          <p:cNvPicPr>
-            <a:picLocks noChangeAspect="1"/>
-          </p:cNvPicPr>
-          <p:nvPr/>
-        </p:nvPicPr>
-        <p:blipFill>
-          <a:blip r:embed="rId2"/>
-          <a:stretch>
-            <a:fillRect/>
-          </a:stretch>
-        </p:blipFill>
-        <p:spPr>
-          <a:xfrm>
-            <a:off x="0" y="0"/>
-            <a:ext cx="12191695" cy="6858000"/>
-          </a:xfrm>
-          <a:prstGeom prst="rect">
-            <a:avLst/>
-          </a:prstGeom>
-        </p:spPr>
-      </p:pic>
-      <p:pic>
-        <p:nvPicPr>
-          <p:cNvPr id="3" name="Picture 2" descr="srh_logo_white.png"/>
-          <p:cNvPicPr>
-            <a:picLocks noChangeAspect="1"/>
-          </p:cNvPicPr>
-          <p:nvPr/>
-        </p:nvPicPr>
-        <p:blipFill>
-          <a:blip r:embed="rId3"/>
-          <a:stretch>
-            <a:fillRect/>
-          </a:stretch>
-        </p:blipFill>
-        <p:spPr>
-          <a:xfrm>
-            <a:off x="10972800" y="320040"/>
-            <a:ext cx="650328" cy="502920"/>
-          </a:xfrm>
-          <a:prstGeom prst="rect">
-            <a:avLst/>
-          </a:prstGeom>
-        </p:spPr>
-      </p:pic>
-    </p:spTree>
-  </p:cSld>
-  <p:clrMapOvr>
-    <a:masterClrMapping/>
-  </p:clrMapOvr>
-</p:sld>
-</file>
-
-<file path=ppt/slides/slide19.xml><?xml version="1.0" encoding="utf-8"?>
-<p:sld xmlns:a="http://schemas.openxmlformats.org/drawingml/2006/main" xmlns:p="http://schemas.openxmlformats.org/presentationml/2006/main" xmlns:r="http://schemas.openxmlformats.org/officeDocument/2006/relationships">
-  <p:cSld>
-    <p:spTree>
-      <p:nvGrpSpPr>
-        <p:cNvPr id="1" name=""/>
-        <p:cNvGrpSpPr/>
-        <p:nvPr/>
-      </p:nvGrpSpPr>
-      <p:grpSpPr/>
-      <p:sp>
-        <p:nvSpPr>
-          <p:cNvPr id="2" name="Rectangle 1"/>
-          <p:cNvSpPr/>
-          <p:nvPr/>
-        </p:nvSpPr>
-        <p:spPr>
-          <a:xfrm>
-            <a:off x="0" y="0"/>
-            <a:ext cx="12191695" cy="6858000"/>
-          </a:xfrm>
-          <a:prstGeom prst="rect">
-            <a:avLst/>
-          </a:prstGeom>
-          <a:solidFill>
-            <a:srgbClr val="FFFFFF"/>
-          </a:solidFill>
-          <a:ln>
-            <a:noFill/>
-          </a:ln>
-        </p:spPr>
-        <p:style>
-          <a:lnRef idx="1">
-            <a:schemeClr val="accent1"/>
-          </a:lnRef>
-          <a:fillRef idx="3">
-            <a:schemeClr val="accent1"/>
-          </a:fillRef>
-          <a:effectRef idx="2">
-            <a:schemeClr val="accent1"/>
-          </a:effectRef>
-          <a:fontRef idx="minor">
-            <a:schemeClr val="lt1"/>
-          </a:fontRef>
-        </p:style>
-        <p:txBody>
-          <a:bodyPr rtlCol="0" anchor="ctr"/>
-          <a:lstStyle/>
-          <a:p>
-            <a:pPr algn="ctr"/>
-          </a:p>
-        </p:txBody>
-      </p:sp>
-      <p:pic>
-        <p:nvPicPr>
-          <p:cNvPr id="3" name="Picture 2" descr="srh_logo_orange.png"/>
-          <p:cNvPicPr>
-            <a:picLocks noChangeAspect="1"/>
-          </p:cNvPicPr>
-          <p:nvPr/>
-        </p:nvPicPr>
-        <p:blipFill>
-          <a:blip r:embed="rId2"/>
-          <a:stretch>
-            <a:fillRect/>
-          </a:stretch>
-        </p:blipFill>
-        <p:spPr>
-          <a:xfrm>
-            <a:off x="10698480" y="256032"/>
-            <a:ext cx="864108" cy="384048"/>
-          </a:xfrm>
-          <a:prstGeom prst="rect">
-            <a:avLst/>
-          </a:prstGeom>
-        </p:spPr>
-      </p:pic>
-      <p:sp>
-        <p:nvSpPr>
-          <p:cNvPr id="4" name="TextBox 3"/>
-          <p:cNvSpPr txBox="1"/>
-          <p:nvPr/>
-        </p:nvSpPr>
-        <p:spPr>
-          <a:xfrm>
-            <a:off x="502920" y="320040"/>
-            <a:ext cx="9144000" cy="502920"/>
-          </a:xfrm>
-          <a:prstGeom prst="rect">
-            <a:avLst/>
-          </a:prstGeom>
-          <a:noFill/>
-        </p:spPr>
-        <p:txBody>
-          <a:bodyPr wrap="none">
-            <a:spAutoFit/>
-          </a:bodyPr>
-          <a:lstStyle/>
-          <a:p>
-            <a:pPr>
-              <a:defRPr sz="2600" b="1">
-                <a:solidFill>
-                  <a:srgbClr val="2D2D2D"/>
-                </a:solidFill>
-                <a:latin typeface="Calibri"/>
-              </a:defRPr>
-            </a:pPr>
-            <a:r>
-              <a:t>Key Results &amp; Business Value</a:t>
-            </a:r>
-          </a:p>
-        </p:txBody>
-      </p:sp>
-      <p:sp>
-        <p:nvSpPr>
-          <p:cNvPr id="5" name="TextBox 4"/>
-          <p:cNvSpPr txBox="1"/>
-          <p:nvPr/>
-        </p:nvSpPr>
-        <p:spPr>
-          <a:xfrm>
-            <a:off x="502920" y="868680"/>
-            <a:ext cx="9144000" cy="365760"/>
-          </a:xfrm>
-          <a:prstGeom prst="rect">
-            <a:avLst/>
-          </a:prstGeom>
-          <a:noFill/>
-        </p:spPr>
-        <p:txBody>
-          <a:bodyPr wrap="none">
-            <a:spAutoFit/>
-          </a:bodyPr>
-          <a:lstStyle/>
-          <a:p>
-            <a:pPr>
-              <a:defRPr sz="1400">
-                <a:solidFill>
-                  <a:srgbClr val="666666"/>
-                </a:solidFill>
-                <a:latin typeface="Calibri"/>
-              </a:defRPr>
-            </a:pPr>
-            <a:r>
-              <a:t>Predictive maintenance · TRL 4–5</a:t>
-            </a:r>
-          </a:p>
-        </p:txBody>
-      </p:sp>
-      <p:pic>
-        <p:nvPicPr>
-          <p:cNvPr id="6" name="Picture 5" descr="viz_key_results.png"/>
-          <p:cNvPicPr>
-            <a:picLocks noChangeAspect="1"/>
-          </p:cNvPicPr>
-          <p:nvPr/>
-        </p:nvPicPr>
-        <p:blipFill>
-          <a:blip r:embed="rId3"/>
-          <a:stretch>
-            <a:fillRect/>
-          </a:stretch>
-        </p:blipFill>
-        <p:spPr>
-          <a:xfrm>
-            <a:off x="502920" y="1234440"/>
-            <a:ext cx="11155680" cy="3851645"/>
-          </a:xfrm>
-          <a:prstGeom prst="rect">
-            <a:avLst/>
-          </a:prstGeom>
-        </p:spPr>
-      </p:pic>
-      <p:sp>
-        <p:nvSpPr>
-          <p:cNvPr id="7" name="TextBox 6"/>
-          <p:cNvSpPr txBox="1"/>
-          <p:nvPr/>
-        </p:nvSpPr>
-        <p:spPr>
-          <a:xfrm>
-            <a:off x="411480" y="6446520"/>
-            <a:ext cx="7315200" cy="320040"/>
-          </a:xfrm>
-          <a:prstGeom prst="rect">
-            <a:avLst/>
-          </a:prstGeom>
-          <a:noFill/>
-        </p:spPr>
-        <p:txBody>
-          <a:bodyPr wrap="none">
-            <a:spAutoFit/>
-          </a:bodyPr>
-          <a:lstStyle/>
-          <a:p>
-            <a:pPr>
-              <a:defRPr sz="900">
-                <a:solidFill>
-                  <a:srgbClr val="666666"/>
-                </a:solidFill>
-                <a:latin typeface="Calibri"/>
-              </a:defRPr>
-            </a:pPr>
-            <a:r>
-              <a:t>SRH University  ·  Prof. Dr. Adele Nasti</a:t>
-            </a:r>
-          </a:p>
-        </p:txBody>
-      </p:sp>
-      <p:sp>
-        <p:nvSpPr>
-          <p:cNvPr id="8" name="TextBox 7"/>
-          <p:cNvSpPr txBox="1"/>
-          <p:nvPr/>
-        </p:nvSpPr>
-        <p:spPr>
-          <a:xfrm>
-            <a:off x="11155680" y="6446520"/>
-            <a:ext cx="731520" cy="320040"/>
-          </a:xfrm>
-          <a:prstGeom prst="rect">
-            <a:avLst/>
-          </a:prstGeom>
-          <a:noFill/>
-        </p:spPr>
-        <p:txBody>
-          <a:bodyPr wrap="none">
-            <a:spAutoFit/>
-          </a:bodyPr>
-          <a:lstStyle/>
-          <a:p>
-            <a:pPr algn="r">
-              <a:defRPr sz="900">
-                <a:solidFill>
-                  <a:srgbClr val="666666"/>
-                </a:solidFill>
-                <a:latin typeface="Calibri"/>
-              </a:defRPr>
-            </a:pPr>
-            <a:r>
-              <a:t>19</a:t>
+              <a:defRPr sz="4800" b="1">
+                <a:solidFill>
+                  <a:srgbClr val="FFFFFF"/>
+                </a:solidFill>
+                <a:latin typeface="Calibri"/>
+              </a:defRPr>
+            </a:pPr>
+            <a:r>
+              <a:t>Thank you</a:t>
+            </a:r>
+          </a:p>
+          <a:p>
+            <a:pPr>
+              <a:spcBef>
+                <a:spcPts val="1200"/>
+              </a:spcBef>
+              <a:defRPr sz="2200">
+                <a:solidFill>
+                  <a:srgbClr val="FDD9C9"/>
+                </a:solidFill>
+                <a:latin typeface="Calibri"/>
+              </a:defRPr>
+            </a:pPr>
+            <a:r>
+              <a:t>Questions welcome</a:t>
             </a:r>
           </a:p>
         </p:txBody>
@@ -5017,9 +5672,52 @@
         <p:nvPr/>
       </p:nvGrpSpPr>
       <p:grpSpPr/>
+      <p:sp>
+        <p:nvSpPr>
+          <p:cNvPr id="2" name="Rectangle 1"/>
+          <p:cNvSpPr/>
+          <p:nvPr/>
+        </p:nvSpPr>
+        <p:spPr>
+          <a:xfrm>
+            <a:off x="0" y="0"/>
+            <a:ext cx="12191695" cy="1097280"/>
+          </a:xfrm>
+          <a:prstGeom prst="rect">
+            <a:avLst/>
+          </a:prstGeom>
+          <a:solidFill>
+            <a:srgbClr val="DF4707"/>
+          </a:solidFill>
+          <a:ln>
+            <a:noFill/>
+          </a:ln>
+        </p:spPr>
+        <p:style>
+          <a:lnRef idx="1">
+            <a:schemeClr val="accent1"/>
+          </a:lnRef>
+          <a:fillRef idx="3">
+            <a:schemeClr val="accent1"/>
+          </a:fillRef>
+          <a:effectRef idx="2">
+            <a:schemeClr val="accent1"/>
+          </a:effectRef>
+          <a:fontRef idx="minor">
+            <a:schemeClr val="lt1"/>
+          </a:fontRef>
+        </p:style>
+        <p:txBody>
+          <a:bodyPr rtlCol="0" anchor="ctr"/>
+          <a:lstStyle/>
+          <a:p>
+            <a:pPr algn="ctr"/>
+          </a:p>
+        </p:txBody>
+      </p:sp>
       <p:pic>
         <p:nvPicPr>
-          <p:cNvPr id="2" name="Picture 1" descr="section_01_problem.png"/>
+          <p:cNvPr id="3" name="Picture 2" descr="srh_logo_orange.png"/>
           <p:cNvPicPr>
             <a:picLocks noChangeAspect="1"/>
           </p:cNvPicPr>
@@ -5033,132 +5731,96 @@
         </p:blipFill>
         <p:spPr>
           <a:xfrm>
-            <a:off x="0" y="0"/>
-            <a:ext cx="12191695" cy="6858000"/>
+            <a:off x="10835640" y="256032"/>
+            <a:ext cx="1131570" cy="502920"/>
           </a:xfrm>
           <a:prstGeom prst="rect">
             <a:avLst/>
           </a:prstGeom>
         </p:spPr>
       </p:pic>
-      <p:pic>
-        <p:nvPicPr>
-          <p:cNvPr id="3" name="Picture 2" descr="srh_logo_white.png"/>
-          <p:cNvPicPr>
-            <a:picLocks noChangeAspect="1"/>
-          </p:cNvPicPr>
-          <p:nvPr/>
-        </p:nvPicPr>
-        <p:blipFill>
-          <a:blip r:embed="rId3"/>
-          <a:stretch>
-            <a:fillRect/>
-          </a:stretch>
-        </p:blipFill>
-        <p:spPr>
-          <a:xfrm>
-            <a:off x="10972800" y="320040"/>
-            <a:ext cx="650328" cy="502920"/>
-          </a:xfrm>
-          <a:prstGeom prst="rect">
-            <a:avLst/>
-          </a:prstGeom>
-        </p:spPr>
-      </p:pic>
-    </p:spTree>
-  </p:cSld>
-  <p:clrMapOvr>
-    <a:masterClrMapping/>
-  </p:clrMapOvr>
-</p:sld>
-</file>
-
-<file path=ppt/slides/slide20.xml><?xml version="1.0" encoding="utf-8"?>
-<p:sld xmlns:a="http://schemas.openxmlformats.org/drawingml/2006/main" xmlns:p="http://schemas.openxmlformats.org/presentationml/2006/main" xmlns:r="http://schemas.openxmlformats.org/officeDocument/2006/relationships">
-  <p:cSld>
-    <p:spTree>
-      <p:nvGrpSpPr>
-        <p:cNvPr id="1" name=""/>
-        <p:cNvGrpSpPr/>
-        <p:nvPr/>
-      </p:nvGrpSpPr>
-      <p:grpSpPr/>
-      <p:pic>
-        <p:nvPicPr>
-          <p:cNvPr id="2" name="Picture 1" descr="section_01_problem.png"/>
-          <p:cNvPicPr>
-            <a:picLocks noChangeAspect="1"/>
-          </p:cNvPicPr>
-          <p:nvPr/>
-        </p:nvPicPr>
-        <p:blipFill>
-          <a:blip r:embed="rId2"/>
-          <a:stretch>
-            <a:fillRect/>
-          </a:stretch>
-        </p:blipFill>
-        <p:spPr>
-          <a:xfrm>
-            <a:off x="0" y="0"/>
-            <a:ext cx="12191695" cy="6858000"/>
-          </a:xfrm>
-          <a:prstGeom prst="rect">
-            <a:avLst/>
-          </a:prstGeom>
-        </p:spPr>
-      </p:pic>
-      <p:pic>
-        <p:nvPicPr>
-          <p:cNvPr id="3" name="Picture 2" descr="srh_logo_white.png"/>
-          <p:cNvPicPr>
-            <a:picLocks noChangeAspect="1"/>
-          </p:cNvPicPr>
-          <p:nvPr/>
-        </p:nvPicPr>
-        <p:blipFill>
-          <a:blip r:embed="rId3"/>
-          <a:stretch>
-            <a:fillRect/>
-          </a:stretch>
-        </p:blipFill>
-        <p:spPr>
-          <a:xfrm>
-            <a:off x="10972800" y="320040"/>
-            <a:ext cx="650328" cy="502920"/>
-          </a:xfrm>
-          <a:prstGeom prst="rect">
-            <a:avLst/>
-          </a:prstGeom>
-        </p:spPr>
-      </p:pic>
-    </p:spTree>
-  </p:cSld>
-  <p:clrMapOvr>
-    <a:masterClrMapping/>
-  </p:clrMapOvr>
-</p:sld>
-</file>
-
-<file path=ppt/slides/slide21.xml><?xml version="1.0" encoding="utf-8"?>
-<p:sld xmlns:a="http://schemas.openxmlformats.org/drawingml/2006/main" xmlns:p="http://schemas.openxmlformats.org/presentationml/2006/main" xmlns:r="http://schemas.openxmlformats.org/officeDocument/2006/relationships">
-  <p:cSld>
-    <p:spTree>
-      <p:nvGrpSpPr>
-        <p:cNvPr id="1" name=""/>
-        <p:cNvGrpSpPr/>
-        <p:nvPr/>
-      </p:nvGrpSpPr>
-      <p:grpSpPr/>
-      <p:sp>
-        <p:nvSpPr>
-          <p:cNvPr id="2" name="Rectangle 1"/>
+      <p:sp>
+        <p:nvSpPr>
+          <p:cNvPr id="4" name="TextBox 3"/>
+          <p:cNvSpPr txBox="1"/>
+          <p:nvPr/>
+        </p:nvSpPr>
+        <p:spPr>
+          <a:xfrm>
+            <a:off x="685800" y="201168"/>
+            <a:ext cx="9601200" cy="502920"/>
+          </a:xfrm>
+          <a:prstGeom prst="rect">
+            <a:avLst/>
+          </a:prstGeom>
+          <a:noFill/>
+        </p:spPr>
+        <p:txBody>
+          <a:bodyPr wrap="none">
+            <a:spAutoFit/>
+          </a:bodyPr>
+          <a:lstStyle/>
+          <a:p>
+            <a:pPr>
+              <a:defRPr sz="3000" b="1">
+                <a:solidFill>
+                  <a:srgbClr val="FFFFFF"/>
+                </a:solidFill>
+                <a:latin typeface="Calibri"/>
+              </a:defRPr>
+            </a:pPr>
+            <a:r>
+              <a:t>1 · Problem</a:t>
+            </a:r>
+          </a:p>
+        </p:txBody>
+      </p:sp>
+      <p:sp>
+        <p:nvSpPr>
+          <p:cNvPr id="5" name="TextBox 4"/>
+          <p:cNvSpPr txBox="1"/>
+          <p:nvPr/>
+        </p:nvSpPr>
+        <p:spPr>
+          <a:xfrm>
+            <a:off x="685800" y="713232"/>
+            <a:ext cx="9601200" cy="320040"/>
+          </a:xfrm>
+          <a:prstGeom prst="rect">
+            <a:avLst/>
+          </a:prstGeom>
+          <a:noFill/>
+        </p:spPr>
+        <p:txBody>
+          <a:bodyPr wrap="none">
+            <a:spAutoFit/>
+          </a:bodyPr>
+          <a:lstStyle/>
+          <a:p>
+            <a:pPr>
+              <a:defRPr sz="1500">
+                <a:solidFill>
+                  <a:srgbClr val="FDD9C9"/>
+                </a:solidFill>
+                <a:latin typeface="Calibri"/>
+              </a:defRPr>
+            </a:pPr>
+            <a:r>
+              <a:t>Predictive maintenance for 5G/6G telecom towers</a:t>
+            </a:r>
+          </a:p>
+        </p:txBody>
+      </p:sp>
+      <p:sp>
+        <p:nvSpPr>
+          <p:cNvPr id="6" name="Rectangle 5"/>
           <p:cNvSpPr/>
           <p:nvPr/>
         </p:nvSpPr>
         <p:spPr>
           <a:xfrm>
-            <a:off x="0" y="0"/>
-            <a:ext cx="12191695" cy="6858000"/>
+            <a:off x="0" y="1097280"/>
+            <a:ext cx="12191695" cy="5760720"/>
           </a:xfrm>
           <a:prstGeom prst="rect">
             <a:avLst/>
@@ -5192,40 +5854,115 @@
           </a:p>
         </p:txBody>
       </p:sp>
-      <p:pic>
-        <p:nvPicPr>
-          <p:cNvPr id="3" name="Picture 2" descr="srh_logo_orange.png"/>
-          <p:cNvPicPr>
-            <a:picLocks noChangeAspect="1"/>
-          </p:cNvPicPr>
-          <p:nvPr/>
-        </p:nvPicPr>
-        <p:blipFill>
-          <a:blip r:embed="rId2"/>
-          <a:stretch>
-            <a:fillRect/>
-          </a:stretch>
-        </p:blipFill>
-        <p:spPr>
-          <a:xfrm>
-            <a:off x="10698480" y="256032"/>
-            <a:ext cx="864108" cy="384048"/>
-          </a:xfrm>
-          <a:prstGeom prst="rect">
-            <a:avLst/>
-          </a:prstGeom>
-        </p:spPr>
-      </p:pic>
-      <p:sp>
-        <p:nvSpPr>
-          <p:cNvPr id="4" name="TextBox 3"/>
+      <p:sp>
+        <p:nvSpPr>
+          <p:cNvPr id="7" name="TextBox 6"/>
           <p:cNvSpPr txBox="1"/>
           <p:nvPr/>
         </p:nvSpPr>
         <p:spPr>
           <a:xfrm>
-            <a:off x="502920" y="320040"/>
-            <a:ext cx="9144000" cy="502920"/>
+            <a:off x="685800" y="1325880"/>
+            <a:ext cx="10820095" cy="4937760"/>
+          </a:xfrm>
+          <a:prstGeom prst="rect">
+            <a:avLst/>
+          </a:prstGeom>
+          <a:noFill/>
+        </p:spPr>
+        <p:txBody>
+          <a:bodyPr wrap="square" anchor="t">
+            <a:spAutoFit/>
+          </a:bodyPr>
+          <a:lstStyle/>
+          <a:p>
+            <a:pPr>
+              <a:lnSpc>
+                <a:spcPct val="125000"/>
+              </a:lnSpc>
+              <a:spcAft>
+                <a:spcPts val="1400"/>
+              </a:spcAft>
+              <a:defRPr sz="2000">
+                <a:solidFill>
+                  <a:srgbClr val="2D2D2D"/>
+                </a:solidFill>
+                <a:latin typeface="Calibri"/>
+              </a:defRPr>
+            </a:pPr>
+            <a:r>
+              <a:t>Tower failures cause outages and revenue loss</a:t>
+            </a:r>
+          </a:p>
+          <a:p>
+            <a:pPr>
+              <a:lnSpc>
+                <a:spcPct val="125000"/>
+              </a:lnSpc>
+              <a:spcAft>
+                <a:spcPts val="1400"/>
+              </a:spcAft>
+              <a:defRPr sz="2000">
+                <a:solidFill>
+                  <a:srgbClr val="2D2D2D"/>
+                </a:solidFill>
+                <a:latin typeface="Calibri"/>
+              </a:defRPr>
+            </a:pPr>
+            <a:r>
+              <a:t>Climber inspections are costly, slow, and risky</a:t>
+            </a:r>
+          </a:p>
+          <a:p>
+            <a:pPr>
+              <a:lnSpc>
+                <a:spcPct val="125000"/>
+              </a:lnSpc>
+              <a:spcAft>
+                <a:spcPts val="1400"/>
+              </a:spcAft>
+              <a:defRPr sz="2000">
+                <a:solidFill>
+                  <a:srgbClr val="2D2D2D"/>
+                </a:solidFill>
+                <a:latin typeface="Calibri"/>
+              </a:defRPr>
+            </a:pPr>
+            <a:r>
+              <a:t>Drone 2D→3D scan gives geometry — but geometry alone is NOT a digital twin</a:t>
+            </a:r>
+          </a:p>
+          <a:p>
+            <a:pPr>
+              <a:lnSpc>
+                <a:spcPct val="125000"/>
+              </a:lnSpc>
+              <a:spcAft>
+                <a:spcPts val="1400"/>
+              </a:spcAft>
+              <a:defRPr sz="2000">
+                <a:solidFill>
+                  <a:srgbClr val="2D2D2D"/>
+                </a:solidFill>
+                <a:latin typeface="Calibri"/>
+              </a:defRPr>
+            </a:pPr>
+            <a:r>
+              <a:t>Goal: predict Remaining Useful Life (RUL) from wind + temperature</a:t>
+            </a:r>
+          </a:p>
+        </p:txBody>
+      </p:sp>
+      <p:sp>
+        <p:nvSpPr>
+          <p:cNvPr id="8" name="TextBox 7"/>
+          <p:cNvSpPr txBox="1"/>
+          <p:nvPr/>
+        </p:nvSpPr>
+        <p:spPr>
+          <a:xfrm>
+            <a:off x="685800" y="6473952"/>
+            <a:ext cx="9144000" cy="274320"/>
           </a:xfrm>
           <a:prstGeom prst="rect">
             <a:avLst/>
@@ -5239,29 +5976,29 @@
           <a:lstStyle/>
           <a:p>
             <a:pPr>
-              <a:defRPr sz="2600" b="1">
-                <a:solidFill>
-                  <a:srgbClr val="2D2D2D"/>
-                </a:solidFill>
-                <a:latin typeface="Calibri"/>
-              </a:defRPr>
-            </a:pPr>
-            <a:r>
-              <a:t>Verification &amp; Validation</a:t>
-            </a:r>
-          </a:p>
-        </p:txBody>
-      </p:sp>
-      <p:sp>
-        <p:nvSpPr>
-          <p:cNvPr id="5" name="TextBox 4"/>
+              <a:defRPr sz="900">
+                <a:solidFill>
+                  <a:srgbClr val="5A5A5A"/>
+                </a:solidFill>
+                <a:latin typeface="Calibri"/>
+              </a:defRPr>
+            </a:pPr>
+            <a:r>
+              <a:t>SRH University  ·  Prof. Dr. Adele Nasti</a:t>
+            </a:r>
+          </a:p>
+        </p:txBody>
+      </p:sp>
+      <p:sp>
+        <p:nvSpPr>
+          <p:cNvPr id="9" name="TextBox 8"/>
           <p:cNvSpPr txBox="1"/>
           <p:nvPr/>
         </p:nvSpPr>
         <p:spPr>
           <a:xfrm>
-            <a:off x="502920" y="868680"/>
-            <a:ext cx="9144000" cy="365760"/>
+            <a:off x="11064240" y="6473952"/>
+            <a:ext cx="548640" cy="274320"/>
           </a:xfrm>
           <a:prstGeom prst="rect">
             <a:avLst/>
@@ -5274,586 +6011,16 @@
           </a:bodyPr>
           <a:lstStyle/>
           <a:p>
-            <a:pPr>
-              <a:defRPr sz="1400">
-                <a:solidFill>
-                  <a:srgbClr val="666666"/>
-                </a:solidFill>
-                <a:latin typeface="Calibri"/>
-              </a:defRPr>
-            </a:pPr>
-            <a:r>
-              <a:t>Sanity checks + future field correlation</a:t>
-            </a:r>
-          </a:p>
-        </p:txBody>
-      </p:sp>
-      <p:pic>
-        <p:nvPicPr>
-          <p:cNvPr id="6" name="Picture 5" descr="viz_vv.png"/>
-          <p:cNvPicPr>
-            <a:picLocks noChangeAspect="1"/>
-          </p:cNvPicPr>
-          <p:nvPr/>
-        </p:nvPicPr>
-        <p:blipFill>
-          <a:blip r:embed="rId3"/>
-          <a:stretch>
-            <a:fillRect/>
-          </a:stretch>
-        </p:blipFill>
-        <p:spPr>
-          <a:xfrm>
-            <a:off x="502920" y="1234440"/>
-            <a:ext cx="11155680" cy="4297873"/>
-          </a:xfrm>
-          <a:prstGeom prst="rect">
-            <a:avLst/>
-          </a:prstGeom>
-        </p:spPr>
-      </p:pic>
-      <p:sp>
-        <p:nvSpPr>
-          <p:cNvPr id="7" name="TextBox 6"/>
-          <p:cNvSpPr txBox="1"/>
-          <p:nvPr/>
-        </p:nvSpPr>
-        <p:spPr>
-          <a:xfrm>
-            <a:off x="411480" y="6446520"/>
-            <a:ext cx="7315200" cy="320040"/>
-          </a:xfrm>
-          <a:prstGeom prst="rect">
-            <a:avLst/>
-          </a:prstGeom>
-          <a:noFill/>
-        </p:spPr>
-        <p:txBody>
-          <a:bodyPr wrap="none">
-            <a:spAutoFit/>
-          </a:bodyPr>
-          <a:lstStyle/>
-          <a:p>
-            <a:pPr>
-              <a:defRPr sz="900">
-                <a:solidFill>
-                  <a:srgbClr val="666666"/>
-                </a:solidFill>
-                <a:latin typeface="Calibri"/>
-              </a:defRPr>
-            </a:pPr>
-            <a:r>
-              <a:t>SRH University  ·  Prof. Dr. Adele Nasti</a:t>
-            </a:r>
-          </a:p>
-        </p:txBody>
-      </p:sp>
-      <p:sp>
-        <p:nvSpPr>
-          <p:cNvPr id="8" name="TextBox 7"/>
-          <p:cNvSpPr txBox="1"/>
-          <p:nvPr/>
-        </p:nvSpPr>
-        <p:spPr>
-          <a:xfrm>
-            <a:off x="11155680" y="6446520"/>
-            <a:ext cx="731520" cy="320040"/>
-          </a:xfrm>
-          <a:prstGeom prst="rect">
-            <a:avLst/>
-          </a:prstGeom>
-          <a:noFill/>
-        </p:spPr>
-        <p:txBody>
-          <a:bodyPr wrap="none">
-            <a:spAutoFit/>
-          </a:bodyPr>
-          <a:lstStyle/>
-          <a:p>
             <a:pPr algn="r">
               <a:defRPr sz="900">
                 <a:solidFill>
-                  <a:srgbClr val="666666"/>
-                </a:solidFill>
-                <a:latin typeface="Calibri"/>
-              </a:defRPr>
-            </a:pPr>
-            <a:r>
-              <a:t>21</a:t>
-            </a:r>
-          </a:p>
-        </p:txBody>
-      </p:sp>
-    </p:spTree>
-  </p:cSld>
-  <p:clrMapOvr>
-    <a:masterClrMapping/>
-  </p:clrMapOvr>
-</p:sld>
-</file>
-
-<file path=ppt/slides/slide22.xml><?xml version="1.0" encoding="utf-8"?>
-<p:sld xmlns:a="http://schemas.openxmlformats.org/drawingml/2006/main" xmlns:p="http://schemas.openxmlformats.org/presentationml/2006/main" xmlns:r="http://schemas.openxmlformats.org/officeDocument/2006/relationships">
-  <p:cSld>
-    <p:spTree>
-      <p:nvGrpSpPr>
-        <p:cNvPr id="1" name=""/>
-        <p:cNvGrpSpPr/>
-        <p:nvPr/>
-      </p:nvGrpSpPr>
-      <p:grpSpPr/>
-      <p:sp>
-        <p:nvSpPr>
-          <p:cNvPr id="2" name="Rectangle 1"/>
-          <p:cNvSpPr/>
-          <p:nvPr/>
-        </p:nvSpPr>
-        <p:spPr>
-          <a:xfrm>
-            <a:off x="0" y="0"/>
-            <a:ext cx="12191695" cy="6858000"/>
-          </a:xfrm>
-          <a:prstGeom prst="rect">
-            <a:avLst/>
-          </a:prstGeom>
-          <a:solidFill>
-            <a:srgbClr val="FFFFFF"/>
-          </a:solidFill>
-          <a:ln>
-            <a:noFill/>
-          </a:ln>
-        </p:spPr>
-        <p:style>
-          <a:lnRef idx="1">
-            <a:schemeClr val="accent1"/>
-          </a:lnRef>
-          <a:fillRef idx="3">
-            <a:schemeClr val="accent1"/>
-          </a:fillRef>
-          <a:effectRef idx="2">
-            <a:schemeClr val="accent1"/>
-          </a:effectRef>
-          <a:fontRef idx="minor">
-            <a:schemeClr val="lt1"/>
-          </a:fontRef>
-        </p:style>
-        <p:txBody>
-          <a:bodyPr rtlCol="0" anchor="ctr"/>
-          <a:lstStyle/>
-          <a:p>
-            <a:pPr algn="ctr"/>
-          </a:p>
-        </p:txBody>
-      </p:sp>
-      <p:pic>
-        <p:nvPicPr>
-          <p:cNvPr id="3" name="Picture 2" descr="srh_logo_orange.png"/>
-          <p:cNvPicPr>
-            <a:picLocks noChangeAspect="1"/>
-          </p:cNvPicPr>
-          <p:nvPr/>
-        </p:nvPicPr>
-        <p:blipFill>
-          <a:blip r:embed="rId2"/>
-          <a:stretch>
-            <a:fillRect/>
-          </a:stretch>
-        </p:blipFill>
-        <p:spPr>
-          <a:xfrm>
-            <a:off x="10698480" y="256032"/>
-            <a:ext cx="864108" cy="384048"/>
-          </a:xfrm>
-          <a:prstGeom prst="rect">
-            <a:avLst/>
-          </a:prstGeom>
-        </p:spPr>
-      </p:pic>
-      <p:sp>
-        <p:nvSpPr>
-          <p:cNvPr id="4" name="TextBox 3"/>
-          <p:cNvSpPr txBox="1"/>
-          <p:nvPr/>
-        </p:nvSpPr>
-        <p:spPr>
-          <a:xfrm>
-            <a:off x="502920" y="365760"/>
-            <a:ext cx="4572000" cy="457200"/>
-          </a:xfrm>
-          <a:prstGeom prst="rect">
-            <a:avLst/>
-          </a:prstGeom>
-          <a:noFill/>
-        </p:spPr>
-        <p:txBody>
-          <a:bodyPr wrap="none">
-            <a:spAutoFit/>
-          </a:bodyPr>
-          <a:lstStyle/>
-          <a:p>
-            <a:pPr>
-              <a:defRPr sz="2600" b="1">
-                <a:solidFill>
-                  <a:srgbClr val="2D2D2D"/>
-                </a:solidFill>
-              </a:defRPr>
-            </a:pPr>
-            <a:r>
-              <a:t>References</a:t>
-            </a:r>
-          </a:p>
-        </p:txBody>
-      </p:sp>
-      <p:sp>
-        <p:nvSpPr>
-          <p:cNvPr id="5" name="TextBox 4"/>
-          <p:cNvSpPr txBox="1"/>
-          <p:nvPr/>
-        </p:nvSpPr>
-        <p:spPr>
-          <a:xfrm>
-            <a:off x="502920" y="1005840"/>
-            <a:ext cx="10972800" cy="5029200"/>
-          </a:xfrm>
-          <a:prstGeom prst="rect">
-            <a:avLst/>
-          </a:prstGeom>
-          <a:noFill/>
-        </p:spPr>
-        <p:txBody>
-          <a:bodyPr wrap="none">
-            <a:spAutoFit/>
-          </a:bodyPr>
-          <a:lstStyle/>
-          <a:p>
-            <a:pPr>
-              <a:spcAft>
-                <a:spcPts val="600"/>
-              </a:spcAft>
-              <a:defRPr sz="1300">
-                <a:solidFill>
-                  <a:srgbClr val="2D2D2D"/>
-                </a:solidFill>
-                <a:latin typeface="Calibri"/>
-              </a:defRPr>
-            </a:pPr>
-            <a:r>
-              <a:t>1. AIAA (2020). Digital Twin: Definition &amp; Value</a:t>
-            </a:r>
-          </a:p>
-          <a:p>
-            <a:pPr>
-              <a:spcAft>
-                <a:spcPts val="600"/>
-              </a:spcAft>
-              <a:defRPr sz="1300">
-                <a:solidFill>
-                  <a:srgbClr val="2D2D2D"/>
-                </a:solidFill>
-                <a:latin typeface="Calibri"/>
-              </a:defRPr>
-            </a:pPr>
-            <a:r>
-              <a:t>2. Grieves &amp; Vickers (2017). Digital Twin: Mitigating Unpredictable Behavior</a:t>
-            </a:r>
-          </a:p>
-          <a:p>
-            <a:pPr>
-              <a:spcAft>
-                <a:spcPts val="600"/>
-              </a:spcAft>
-              <a:defRPr sz="1300">
-                <a:solidFill>
-                  <a:srgbClr val="2D2D2D"/>
-                </a:solidFill>
-                <a:latin typeface="Calibri"/>
-              </a:defRPr>
-            </a:pPr>
-            <a:r>
-              <a:t>3. Tao et al. (2019). Digital Twin in Industry. IEEE TII</a:t>
-            </a:r>
-          </a:p>
-          <a:p>
-            <a:pPr>
-              <a:spcAft>
-                <a:spcPts val="600"/>
-              </a:spcAft>
-              <a:defRPr sz="1300">
-                <a:solidFill>
-                  <a:srgbClr val="2D2D2D"/>
-                </a:solidFill>
-                <a:latin typeface="Calibri"/>
-              </a:defRPr>
-            </a:pPr>
-            <a:r>
-              <a:t>4. Montgomery (2017). Design and Analysis of Experiments</a:t>
-            </a:r>
-          </a:p>
-          <a:p>
-            <a:pPr>
-              <a:spcAft>
-                <a:spcPts val="600"/>
-              </a:spcAft>
-              <a:defRPr sz="1300">
-                <a:solidFill>
-                  <a:srgbClr val="2D2D2D"/>
-                </a:solidFill>
-                <a:latin typeface="Calibri"/>
-              </a:defRPr>
-            </a:pPr>
-            <a:r>
-              <a:t>5. Jardine et al. (2006). Machinery diagnostics review</a:t>
-            </a:r>
-          </a:p>
-          <a:p>
-            <a:pPr>
-              <a:spcAft>
-                <a:spcPts val="600"/>
-              </a:spcAft>
-              <a:defRPr sz="1300">
-                <a:solidFill>
-                  <a:srgbClr val="2D2D2D"/>
-                </a:solidFill>
-                <a:latin typeface="Calibri"/>
-              </a:defRPr>
-            </a:pPr>
-            <a:r>
-              <a:t>6. Liu et al. (2021). UAV photogrammetry for telecom towers</a:t>
-            </a:r>
-          </a:p>
-          <a:p>
-            <a:pPr>
-              <a:spcAft>
-                <a:spcPts val="600"/>
-              </a:spcAft>
-              <a:defRPr sz="1300">
-                <a:solidFill>
-                  <a:srgbClr val="2D2D2D"/>
-                </a:solidFill>
-                <a:latin typeface="Calibri"/>
-              </a:defRPr>
-            </a:pPr>
-            <a:r>
-              <a:t>7. Kapteyn et al. (2021). Predictive digital twins. Nature Comp Sci</a:t>
-            </a:r>
-          </a:p>
-          <a:p>
-            <a:pPr>
-              <a:spcAft>
-                <a:spcPts val="600"/>
-              </a:spcAft>
-              <a:defRPr sz="1300">
-                <a:solidFill>
-                  <a:srgbClr val="2D2D2D"/>
-                </a:solidFill>
-                <a:latin typeface="Calibri"/>
-              </a:defRPr>
-            </a:pPr>
-            <a:r>
-              <a:t>8. ISO/IEC 30173:2023 — Digital twin terminology</a:t>
-            </a:r>
-          </a:p>
-          <a:p>
-            <a:pPr>
-              <a:spcAft>
-                <a:spcPts val="600"/>
-              </a:spcAft>
-              <a:defRPr sz="1300">
-                <a:solidFill>
-                  <a:srgbClr val="2D2D2D"/>
-                </a:solidFill>
-                <a:latin typeface="Calibri"/>
-              </a:defRPr>
-            </a:pPr>
-            <a:r>
-              <a:t>9. Siemens (2024). HEEDS Multi-Disciplinary Design Exploration</a:t>
-            </a:r>
-          </a:p>
-        </p:txBody>
-      </p:sp>
-      <p:sp>
-        <p:nvSpPr>
-          <p:cNvPr id="6" name="TextBox 5"/>
-          <p:cNvSpPr txBox="1"/>
-          <p:nvPr/>
-        </p:nvSpPr>
-        <p:spPr>
-          <a:xfrm>
-            <a:off x="411480" y="6446520"/>
-            <a:ext cx="7315200" cy="320040"/>
-          </a:xfrm>
-          <a:prstGeom prst="rect">
-            <a:avLst/>
-          </a:prstGeom>
-          <a:noFill/>
-        </p:spPr>
-        <p:txBody>
-          <a:bodyPr wrap="none">
-            <a:spAutoFit/>
-          </a:bodyPr>
-          <a:lstStyle/>
-          <a:p>
-            <a:pPr>
-              <a:defRPr sz="900">
-                <a:solidFill>
-                  <a:srgbClr val="666666"/>
-                </a:solidFill>
-                <a:latin typeface="Calibri"/>
-              </a:defRPr>
-            </a:pPr>
-            <a:r>
-              <a:t>SRH University  ·  Prof. Dr. Adele Nasti</a:t>
-            </a:r>
-          </a:p>
-        </p:txBody>
-      </p:sp>
-      <p:sp>
-        <p:nvSpPr>
-          <p:cNvPr id="7" name="TextBox 6"/>
-          <p:cNvSpPr txBox="1"/>
-          <p:nvPr/>
-        </p:nvSpPr>
-        <p:spPr>
-          <a:xfrm>
-            <a:off x="11155680" y="6446520"/>
-            <a:ext cx="731520" cy="320040"/>
-          </a:xfrm>
-          <a:prstGeom prst="rect">
-            <a:avLst/>
-          </a:prstGeom>
-          <a:noFill/>
-        </p:spPr>
-        <p:txBody>
-          <a:bodyPr wrap="none">
-            <a:spAutoFit/>
-          </a:bodyPr>
-          <a:lstStyle/>
-          <a:p>
-            <a:pPr algn="r">
-              <a:defRPr sz="900">
-                <a:solidFill>
-                  <a:srgbClr val="666666"/>
-                </a:solidFill>
-                <a:latin typeface="Calibri"/>
-              </a:defRPr>
-            </a:pPr>
-            <a:r>
-              <a:t>22</a:t>
-            </a:r>
-          </a:p>
-        </p:txBody>
-      </p:sp>
-    </p:spTree>
-  </p:cSld>
-  <p:clrMapOvr>
-    <a:masterClrMapping/>
-  </p:clrMapOvr>
-</p:sld>
-</file>
-
-<file path=ppt/slides/slide23.xml><?xml version="1.0" encoding="utf-8"?>
-<p:sld xmlns:a="http://schemas.openxmlformats.org/drawingml/2006/main" xmlns:p="http://schemas.openxmlformats.org/presentationml/2006/main" xmlns:r="http://schemas.openxmlformats.org/officeDocument/2006/relationships">
-  <p:cSld>
-    <p:spTree>
-      <p:nvGrpSpPr>
-        <p:cNvPr id="1" name=""/>
-        <p:cNvGrpSpPr/>
-        <p:nvPr/>
-      </p:nvGrpSpPr>
-      <p:grpSpPr/>
-      <p:pic>
-        <p:nvPicPr>
-          <p:cNvPr id="2" name="Picture 1" descr="bg_title_antenna.png"/>
-          <p:cNvPicPr>
-            <a:picLocks noChangeAspect="1"/>
-          </p:cNvPicPr>
-          <p:nvPr/>
-        </p:nvPicPr>
-        <p:blipFill>
-          <a:blip r:embed="rId2"/>
-          <a:stretch>
-            <a:fillRect/>
-          </a:stretch>
-        </p:blipFill>
-        <p:spPr>
-          <a:xfrm>
-            <a:off x="0" y="0"/>
-            <a:ext cx="12191695" cy="6858000"/>
-          </a:xfrm>
-          <a:prstGeom prst="rect">
-            <a:avLst/>
-          </a:prstGeom>
-        </p:spPr>
-      </p:pic>
-      <p:pic>
-        <p:nvPicPr>
-          <p:cNvPr id="3" name="Picture 2" descr="srh_logo_white.png"/>
-          <p:cNvPicPr>
-            <a:picLocks noChangeAspect="1"/>
-          </p:cNvPicPr>
-          <p:nvPr/>
-        </p:nvPicPr>
-        <p:blipFill>
-          <a:blip r:embed="rId3"/>
-          <a:stretch>
-            <a:fillRect/>
-          </a:stretch>
-        </p:blipFill>
-        <p:spPr>
-          <a:xfrm>
-            <a:off x="411480" y="320040"/>
-            <a:ext cx="650328" cy="502920"/>
-          </a:xfrm>
-          <a:prstGeom prst="rect">
-            <a:avLst/>
-          </a:prstGeom>
-        </p:spPr>
-      </p:pic>
-      <p:sp>
-        <p:nvSpPr>
-          <p:cNvPr id="4" name="TextBox 3"/>
-          <p:cNvSpPr txBox="1"/>
-          <p:nvPr/>
-        </p:nvSpPr>
-        <p:spPr>
-          <a:xfrm>
-            <a:off x="502920" y="2743200"/>
-            <a:ext cx="9144000" cy="1371600"/>
-          </a:xfrm>
-          <a:prstGeom prst="rect">
-            <a:avLst/>
-          </a:prstGeom>
-          <a:noFill/>
-        </p:spPr>
-        <p:txBody>
-          <a:bodyPr wrap="none">
-            <a:spAutoFit/>
-          </a:bodyPr>
-          <a:lstStyle/>
-          <a:p>
-            <a:pPr>
-              <a:defRPr sz="4400" b="1">
-                <a:solidFill>
-                  <a:srgbClr val="FFFFFF"/>
-                </a:solidFill>
-                <a:latin typeface="Calibri"/>
-              </a:defRPr>
-            </a:pPr>
-            <a:r>
-              <a:t>Thank you</a:t>
-            </a:r>
-          </a:p>
-          <a:p>
-            <a:pPr>
-              <a:defRPr sz="2000">
-                <a:solidFill>
-                  <a:srgbClr val="FFFFFF"/>
-                </a:solidFill>
-                <a:latin typeface="Calibri"/>
-              </a:defRPr>
-            </a:pPr>
-            <a:r>
-              <a:t>Questions welcome</a:t>
+                  <a:srgbClr val="5A5A5A"/>
+                </a:solidFill>
+                <a:latin typeface="Calibri"/>
+              </a:defRPr>
+            </a:pPr>
+            <a:r>
+              <a:t>2</a:t>
             </a:r>
           </a:p>
         </p:txBody>
@@ -5885,13 +6052,13 @@
         <p:spPr>
           <a:xfrm>
             <a:off x="0" y="0"/>
-            <a:ext cx="12191695" cy="6858000"/>
+            <a:ext cx="12191695" cy="1097280"/>
           </a:xfrm>
           <a:prstGeom prst="rect">
             <a:avLst/>
           </a:prstGeom>
           <a:solidFill>
-            <a:srgbClr val="FFFFFF"/>
+            <a:srgbClr val="DF4707"/>
           </a:solidFill>
           <a:ln>
             <a:noFill/>
@@ -5935,8 +6102,8 @@
         </p:blipFill>
         <p:spPr>
           <a:xfrm>
-            <a:off x="10698480" y="256032"/>
-            <a:ext cx="864108" cy="384048"/>
+            <a:off x="10835640" y="256032"/>
+            <a:ext cx="1131570" cy="502920"/>
           </a:xfrm>
           <a:prstGeom prst="rect">
             <a:avLst/>
@@ -5951,8 +6118,8 @@
         </p:nvSpPr>
         <p:spPr>
           <a:xfrm>
-            <a:off x="502920" y="320040"/>
-            <a:ext cx="9144000" cy="502920"/>
+            <a:off x="685800" y="201168"/>
+            <a:ext cx="9601200" cy="502920"/>
           </a:xfrm>
           <a:prstGeom prst="rect">
             <a:avLst/>
@@ -5966,29 +6133,72 @@
           <a:lstStyle/>
           <a:p>
             <a:pPr>
-              <a:defRPr sz="2600" b="1">
-                <a:solidFill>
-                  <a:srgbClr val="2D2D2D"/>
-                </a:solidFill>
-                <a:latin typeface="Calibri"/>
-              </a:defRPr>
-            </a:pPr>
-            <a:r>
-              <a:t>The Problem</a:t>
-            </a:r>
-          </a:p>
-        </p:txBody>
-      </p:sp>
-      <p:sp>
-        <p:nvSpPr>
-          <p:cNvPr id="5" name="TextBox 4"/>
+              <a:defRPr sz="3000" b="1">
+                <a:solidFill>
+                  <a:srgbClr val="FFFFFF"/>
+                </a:solidFill>
+                <a:latin typeface="Calibri"/>
+              </a:defRPr>
+            </a:pPr>
+            <a:r>
+              <a:t>2 · Digital Twin Definition</a:t>
+            </a:r>
+          </a:p>
+        </p:txBody>
+      </p:sp>
+      <p:sp>
+        <p:nvSpPr>
+          <p:cNvPr id="5" name="Rectangle 4"/>
+          <p:cNvSpPr/>
+          <p:nvPr/>
+        </p:nvSpPr>
+        <p:spPr>
+          <a:xfrm>
+            <a:off x="0" y="1097280"/>
+            <a:ext cx="12191695" cy="5760720"/>
+          </a:xfrm>
+          <a:prstGeom prst="rect">
+            <a:avLst/>
+          </a:prstGeom>
+          <a:solidFill>
+            <a:srgbClr val="FFFFFF"/>
+          </a:solidFill>
+          <a:ln>
+            <a:noFill/>
+          </a:ln>
+        </p:spPr>
+        <p:style>
+          <a:lnRef idx="1">
+            <a:schemeClr val="accent1"/>
+          </a:lnRef>
+          <a:fillRef idx="3">
+            <a:schemeClr val="accent1"/>
+          </a:fillRef>
+          <a:effectRef idx="2">
+            <a:schemeClr val="accent1"/>
+          </a:effectRef>
+          <a:fontRef idx="minor">
+            <a:schemeClr val="lt1"/>
+          </a:fontRef>
+        </p:style>
+        <p:txBody>
+          <a:bodyPr rtlCol="0" anchor="ctr"/>
+          <a:lstStyle/>
+          <a:p>
+            <a:pPr algn="ctr"/>
+          </a:p>
+        </p:txBody>
+      </p:sp>
+      <p:sp>
+        <p:nvSpPr>
+          <p:cNvPr id="6" name="TextBox 5"/>
           <p:cNvSpPr txBox="1"/>
           <p:nvPr/>
         </p:nvSpPr>
         <p:spPr>
           <a:xfrm>
-            <a:off x="502920" y="868680"/>
-            <a:ext cx="9144000" cy="365760"/>
+            <a:off x="685800" y="1325880"/>
+            <a:ext cx="5120640" cy="4937760"/>
           </a:xfrm>
           <a:prstGeom prst="rect">
             <a:avLst/>
@@ -5996,28 +6206,112 @@
           <a:noFill/>
         </p:spPr>
         <p:txBody>
-          <a:bodyPr wrap="none">
+          <a:bodyPr wrap="square" anchor="t">
             <a:spAutoFit/>
           </a:bodyPr>
           <a:lstStyle/>
           <a:p>
             <a:pPr>
-              <a:defRPr sz="1400">
-                <a:solidFill>
-                  <a:srgbClr val="666666"/>
-                </a:solidFill>
-                <a:latin typeface="Calibri"/>
-              </a:defRPr>
-            </a:pPr>
-            <a:r>
-              <a:t>Predictive maintenance for telecom infrastructure</a:t>
+              <a:lnSpc>
+                <a:spcPct val="125000"/>
+              </a:lnSpc>
+              <a:spcAft>
+                <a:spcPts val="1200"/>
+              </a:spcAft>
+              <a:defRPr sz="1800">
+                <a:solidFill>
+                  <a:srgbClr val="2D2D2D"/>
+                </a:solidFill>
+                <a:latin typeface="Calibri"/>
+              </a:defRPr>
+            </a:pPr>
+            <a:r>
+              <a:t>Digital representation throughout its lifecycle</a:t>
+            </a:r>
+          </a:p>
+          <a:p>
+            <a:pPr>
+              <a:spcAft>
+                <a:spcPts val="600"/>
+              </a:spcAft>
+            </a:pPr>
+          </a:p>
+          <a:p>
+            <a:pPr>
+              <a:lnSpc>
+                <a:spcPct val="125000"/>
+              </a:lnSpc>
+              <a:spcAft>
+                <a:spcPts val="1200"/>
+              </a:spcAft>
+              <a:defRPr sz="1800">
+                <a:solidFill>
+                  <a:srgbClr val="2D2D2D"/>
+                </a:solidFill>
+                <a:latin typeface="Calibri"/>
+              </a:defRPr>
+            </a:pPr>
+            <a:r>
+              <a:t>NOT a static CAD copy</a:t>
+            </a:r>
+          </a:p>
+          <a:p>
+            <a:pPr>
+              <a:spcAft>
+                <a:spcPts val="600"/>
+              </a:spcAft>
+            </a:pPr>
+          </a:p>
+          <a:p>
+            <a:pPr>
+              <a:lnSpc>
+                <a:spcPct val="125000"/>
+              </a:lnSpc>
+              <a:spcAft>
+                <a:spcPts val="1200"/>
+              </a:spcAft>
+              <a:defRPr sz="1800">
+                <a:solidFill>
+                  <a:srgbClr val="2D2D2D"/>
+                </a:solidFill>
+                <a:latin typeface="Calibri"/>
+              </a:defRPr>
+            </a:pPr>
+            <a:r>
+              <a:t>Stages: Design → Manufacture → Build → Test → Service</a:t>
+            </a:r>
+          </a:p>
+          <a:p>
+            <a:pPr>
+              <a:spcAft>
+                <a:spcPts val="600"/>
+              </a:spcAft>
+            </a:pPr>
+          </a:p>
+          <a:p>
+            <a:pPr>
+              <a:lnSpc>
+                <a:spcPct val="125000"/>
+              </a:lnSpc>
+              <a:spcAft>
+                <a:spcPts val="1200"/>
+              </a:spcAft>
+              <a:defRPr sz="1800">
+                <a:solidFill>
+                  <a:srgbClr val="2D2D2D"/>
+                </a:solidFill>
+                <a:latin typeface="Calibri"/>
+              </a:defRPr>
+            </a:pPr>
+            <a:r>
+              <a:t>Twin does NOT replace experimental testing</a:t>
             </a:r>
           </a:p>
         </p:txBody>
       </p:sp>
       <p:pic>
         <p:nvPicPr>
-          <p:cNvPr id="6" name="Picture 5" descr="viz_problem.png"/>
+          <p:cNvPr id="7" name="Picture 6" descr="viz_lifecycle.png"/>
           <p:cNvPicPr>
             <a:picLocks noChangeAspect="1"/>
           </p:cNvPicPr>
@@ -6031,8 +6325,8 @@
         </p:blipFill>
         <p:spPr>
           <a:xfrm>
-            <a:off x="502920" y="1234440"/>
-            <a:ext cx="11155680" cy="4755843"/>
+            <a:off x="6263640" y="1325880"/>
+            <a:ext cx="5669280" cy="2421510"/>
           </a:xfrm>
           <a:prstGeom prst="rect">
             <a:avLst/>
@@ -6041,14 +6335,14 @@
       </p:pic>
       <p:sp>
         <p:nvSpPr>
-          <p:cNvPr id="7" name="TextBox 6"/>
+          <p:cNvPr id="8" name="TextBox 7"/>
           <p:cNvSpPr txBox="1"/>
           <p:nvPr/>
         </p:nvSpPr>
         <p:spPr>
           <a:xfrm>
-            <a:off x="411480" y="6446520"/>
-            <a:ext cx="7315200" cy="320040"/>
+            <a:off x="685800" y="6473952"/>
+            <a:ext cx="9144000" cy="274320"/>
           </a:xfrm>
           <a:prstGeom prst="rect">
             <a:avLst/>
@@ -6064,7 +6358,7 @@
             <a:pPr>
               <a:defRPr sz="900">
                 <a:solidFill>
-                  <a:srgbClr val="666666"/>
+                  <a:srgbClr val="5A5A5A"/>
                 </a:solidFill>
                 <a:latin typeface="Calibri"/>
               </a:defRPr>
@@ -6077,14 +6371,14 @@
       </p:sp>
       <p:sp>
         <p:nvSpPr>
-          <p:cNvPr id="8" name="TextBox 7"/>
+          <p:cNvPr id="9" name="TextBox 8"/>
           <p:cNvSpPr txBox="1"/>
           <p:nvPr/>
         </p:nvSpPr>
         <p:spPr>
           <a:xfrm>
-            <a:off x="11155680" y="6446520"/>
-            <a:ext cx="731520" cy="320040"/>
+            <a:off x="11064240" y="6473952"/>
+            <a:ext cx="548640" cy="274320"/>
           </a:xfrm>
           <a:prstGeom prst="rect">
             <a:avLst/>
@@ -6100,7 +6394,7 @@
             <a:pPr algn="r">
               <a:defRPr sz="900">
                 <a:solidFill>
-                  <a:srgbClr val="666666"/>
+                  <a:srgbClr val="5A5A5A"/>
                 </a:solidFill>
                 <a:latin typeface="Calibri"/>
               </a:defRPr>
@@ -6129,9 +6423,52 @@
         <p:nvPr/>
       </p:nvGrpSpPr>
       <p:grpSpPr/>
+      <p:sp>
+        <p:nvSpPr>
+          <p:cNvPr id="2" name="Rectangle 1"/>
+          <p:cNvSpPr/>
+          <p:nvPr/>
+        </p:nvSpPr>
+        <p:spPr>
+          <a:xfrm>
+            <a:off x="0" y="0"/>
+            <a:ext cx="12191695" cy="1097280"/>
+          </a:xfrm>
+          <a:prstGeom prst="rect">
+            <a:avLst/>
+          </a:prstGeom>
+          <a:solidFill>
+            <a:srgbClr val="DF4707"/>
+          </a:solidFill>
+          <a:ln>
+            <a:noFill/>
+          </a:ln>
+        </p:spPr>
+        <p:style>
+          <a:lnRef idx="1">
+            <a:schemeClr val="accent1"/>
+          </a:lnRef>
+          <a:fillRef idx="3">
+            <a:schemeClr val="accent1"/>
+          </a:fillRef>
+          <a:effectRef idx="2">
+            <a:schemeClr val="accent1"/>
+          </a:effectRef>
+          <a:fontRef idx="minor">
+            <a:schemeClr val="lt1"/>
+          </a:fontRef>
+        </p:style>
+        <p:txBody>
+          <a:bodyPr rtlCol="0" anchor="ctr"/>
+          <a:lstStyle/>
+          <a:p>
+            <a:pPr algn="ctr"/>
+          </a:p>
+        </p:txBody>
+      </p:sp>
       <p:pic>
         <p:nvPicPr>
-          <p:cNvPr id="2" name="Picture 1" descr="section_01_problem.png"/>
+          <p:cNvPr id="3" name="Picture 2" descr="srh_logo_orange.png"/>
           <p:cNvPicPr>
             <a:picLocks noChangeAspect="1"/>
           </p:cNvPicPr>
@@ -6145,17 +6482,132 @@
         </p:blipFill>
         <p:spPr>
           <a:xfrm>
-            <a:off x="0" y="0"/>
-            <a:ext cx="12191695" cy="6858000"/>
+            <a:off x="10835640" y="256032"/>
+            <a:ext cx="1131570" cy="502920"/>
           </a:xfrm>
           <a:prstGeom prst="rect">
             <a:avLst/>
           </a:prstGeom>
         </p:spPr>
       </p:pic>
+      <p:sp>
+        <p:nvSpPr>
+          <p:cNvPr id="4" name="TextBox 3"/>
+          <p:cNvSpPr txBox="1"/>
+          <p:nvPr/>
+        </p:nvSpPr>
+        <p:spPr>
+          <a:xfrm>
+            <a:off x="685800" y="201168"/>
+            <a:ext cx="9601200" cy="502920"/>
+          </a:xfrm>
+          <a:prstGeom prst="rect">
+            <a:avLst/>
+          </a:prstGeom>
+          <a:noFill/>
+        </p:spPr>
+        <p:txBody>
+          <a:bodyPr wrap="none">
+            <a:spAutoFit/>
+          </a:bodyPr>
+          <a:lstStyle/>
+          <a:p>
+            <a:pPr>
+              <a:defRPr sz="3000" b="1">
+                <a:solidFill>
+                  <a:srgbClr val="FFFFFF"/>
+                </a:solidFill>
+                <a:latin typeface="Calibri"/>
+              </a:defRPr>
+            </a:pPr>
+            <a:r>
+              <a:t>3 · End-to-End Approach</a:t>
+            </a:r>
+          </a:p>
+        </p:txBody>
+      </p:sp>
+      <p:sp>
+        <p:nvSpPr>
+          <p:cNvPr id="5" name="TextBox 4"/>
+          <p:cNvSpPr txBox="1"/>
+          <p:nvPr/>
+        </p:nvSpPr>
+        <p:spPr>
+          <a:xfrm>
+            <a:off x="685800" y="713232"/>
+            <a:ext cx="9601200" cy="320040"/>
+          </a:xfrm>
+          <a:prstGeom prst="rect">
+            <a:avLst/>
+          </a:prstGeom>
+          <a:noFill/>
+        </p:spPr>
+        <p:txBody>
+          <a:bodyPr wrap="none">
+            <a:spAutoFit/>
+          </a:bodyPr>
+          <a:lstStyle/>
+          <a:p>
+            <a:pPr>
+              <a:defRPr sz="1500">
+                <a:solidFill>
+                  <a:srgbClr val="FDD9C9"/>
+                </a:solidFill>
+                <a:latin typeface="Calibri"/>
+              </a:defRPr>
+            </a:pPr>
+            <a:r>
+              <a:t>Drone geometry + physics RUL + Design of Experiments</a:t>
+            </a:r>
+          </a:p>
+        </p:txBody>
+      </p:sp>
+      <p:sp>
+        <p:nvSpPr>
+          <p:cNvPr id="6" name="Rectangle 5"/>
+          <p:cNvSpPr/>
+          <p:nvPr/>
+        </p:nvSpPr>
+        <p:spPr>
+          <a:xfrm>
+            <a:off x="0" y="1097280"/>
+            <a:ext cx="12191695" cy="5760720"/>
+          </a:xfrm>
+          <a:prstGeom prst="rect">
+            <a:avLst/>
+          </a:prstGeom>
+          <a:solidFill>
+            <a:srgbClr val="FFFFFF"/>
+          </a:solidFill>
+          <a:ln>
+            <a:noFill/>
+          </a:ln>
+        </p:spPr>
+        <p:style>
+          <a:lnRef idx="1">
+            <a:schemeClr val="accent1"/>
+          </a:lnRef>
+          <a:fillRef idx="3">
+            <a:schemeClr val="accent1"/>
+          </a:fillRef>
+          <a:effectRef idx="2">
+            <a:schemeClr val="accent1"/>
+          </a:effectRef>
+          <a:fontRef idx="minor">
+            <a:schemeClr val="lt1"/>
+          </a:fontRef>
+        </p:style>
+        <p:txBody>
+          <a:bodyPr rtlCol="0" anchor="ctr"/>
+          <a:lstStyle/>
+          <a:p>
+            <a:pPr algn="ctr"/>
+          </a:p>
+        </p:txBody>
+      </p:sp>
       <p:pic>
         <p:nvPicPr>
-          <p:cNvPr id="3" name="Picture 2" descr="srh_logo_white.png"/>
+          <p:cNvPr id="7" name="Picture 6" descr="viz_workflow.png"/>
           <p:cNvPicPr>
             <a:picLocks noChangeAspect="1"/>
           </p:cNvPicPr>
@@ -6169,14 +6621,122 @@
         </p:blipFill>
         <p:spPr>
           <a:xfrm>
-            <a:off x="10972800" y="320040"/>
-            <a:ext cx="650328" cy="502920"/>
+            <a:off x="685800" y="1417320"/>
+            <a:ext cx="10820095" cy="3898148"/>
           </a:xfrm>
           <a:prstGeom prst="rect">
             <a:avLst/>
           </a:prstGeom>
         </p:spPr>
       </p:pic>
+      <p:sp>
+        <p:nvSpPr>
+          <p:cNvPr id="8" name="TextBox 7"/>
+          <p:cNvSpPr txBox="1"/>
+          <p:nvPr/>
+        </p:nvSpPr>
+        <p:spPr>
+          <a:xfrm>
+            <a:off x="685800" y="5879592"/>
+            <a:ext cx="10820095" cy="365760"/>
+          </a:xfrm>
+          <a:prstGeom prst="rect">
+            <a:avLst/>
+          </a:prstGeom>
+          <a:noFill/>
+        </p:spPr>
+        <p:txBody>
+          <a:bodyPr wrap="none">
+            <a:spAutoFit/>
+          </a:bodyPr>
+          <a:lstStyle/>
+          <a:p>
+            <a:pPr>
+              <a:defRPr sz="1300" i="1">
+                <a:solidFill>
+                  <a:srgbClr val="5A5A5A"/>
+                </a:solidFill>
+                <a:latin typeface="Calibri"/>
+              </a:defRPr>
+            </a:pPr>
+            <a:r>
+              <a:t>Pipeline extends real industrial drone inspection into predictive maintenance</a:t>
+            </a:r>
+          </a:p>
+        </p:txBody>
+      </p:sp>
+      <p:sp>
+        <p:nvSpPr>
+          <p:cNvPr id="9" name="TextBox 8"/>
+          <p:cNvSpPr txBox="1"/>
+          <p:nvPr/>
+        </p:nvSpPr>
+        <p:spPr>
+          <a:xfrm>
+            <a:off x="685800" y="6473952"/>
+            <a:ext cx="9144000" cy="274320"/>
+          </a:xfrm>
+          <a:prstGeom prst="rect">
+            <a:avLst/>
+          </a:prstGeom>
+          <a:noFill/>
+        </p:spPr>
+        <p:txBody>
+          <a:bodyPr wrap="none">
+            <a:spAutoFit/>
+          </a:bodyPr>
+          <a:lstStyle/>
+          <a:p>
+            <a:pPr>
+              <a:defRPr sz="900">
+                <a:solidFill>
+                  <a:srgbClr val="5A5A5A"/>
+                </a:solidFill>
+                <a:latin typeface="Calibri"/>
+              </a:defRPr>
+            </a:pPr>
+            <a:r>
+              <a:t>SRH University  ·  Prof. Dr. Adele Nasti</a:t>
+            </a:r>
+          </a:p>
+        </p:txBody>
+      </p:sp>
+      <p:sp>
+        <p:nvSpPr>
+          <p:cNvPr id="10" name="TextBox 9"/>
+          <p:cNvSpPr txBox="1"/>
+          <p:nvPr/>
+        </p:nvSpPr>
+        <p:spPr>
+          <a:xfrm>
+            <a:off x="11064240" y="6473952"/>
+            <a:ext cx="548640" cy="274320"/>
+          </a:xfrm>
+          <a:prstGeom prst="rect">
+            <a:avLst/>
+          </a:prstGeom>
+          <a:noFill/>
+        </p:spPr>
+        <p:txBody>
+          <a:bodyPr wrap="none">
+            <a:spAutoFit/>
+          </a:bodyPr>
+          <a:lstStyle/>
+          <a:p>
+            <a:pPr algn="r">
+              <a:defRPr sz="900">
+                <a:solidFill>
+                  <a:srgbClr val="5A5A5A"/>
+                </a:solidFill>
+                <a:latin typeface="Calibri"/>
+              </a:defRPr>
+            </a:pPr>
+            <a:r>
+              <a:t>4</a:t>
+            </a:r>
+          </a:p>
+        </p:txBody>
+      </p:sp>
     </p:spTree>
   </p:cSld>
   <p:clrMapOvr>
@@ -6204,13 +6764,13 @@
         <p:spPr>
           <a:xfrm>
             <a:off x="0" y="0"/>
-            <a:ext cx="12191695" cy="6858000"/>
+            <a:ext cx="12191695" cy="1097280"/>
           </a:xfrm>
           <a:prstGeom prst="rect">
             <a:avLst/>
           </a:prstGeom>
           <a:solidFill>
-            <a:srgbClr val="FFFFFF"/>
+            <a:srgbClr val="DF4707"/>
           </a:solidFill>
           <a:ln>
             <a:noFill/>
@@ -6254,8 +6814,8 @@
         </p:blipFill>
         <p:spPr>
           <a:xfrm>
-            <a:off x="10698480" y="256032"/>
-            <a:ext cx="864108" cy="384048"/>
+            <a:off x="10835640" y="256032"/>
+            <a:ext cx="1131570" cy="502920"/>
           </a:xfrm>
           <a:prstGeom prst="rect">
             <a:avLst/>
@@ -6270,8 +6830,8 @@
         </p:nvSpPr>
         <p:spPr>
           <a:xfrm>
-            <a:off x="502920" y="320040"/>
-            <a:ext cx="9144000" cy="502920"/>
+            <a:off x="685800" y="201168"/>
+            <a:ext cx="9601200" cy="502920"/>
           </a:xfrm>
           <a:prstGeom prst="rect">
             <a:avLst/>
@@ -6285,15 +6845,15 @@
           <a:lstStyle/>
           <a:p>
             <a:pPr>
-              <a:defRPr sz="2600" b="1">
-                <a:solidFill>
-                  <a:srgbClr val="2D2D2D"/>
-                </a:solidFill>
-                <a:latin typeface="Calibri"/>
-              </a:defRPr>
-            </a:pPr>
-            <a:r>
-              <a:t>Digital Twin Definition</a:t>
+              <a:defRPr sz="3000" b="1">
+                <a:solidFill>
+                  <a:srgbClr val="FFFFFF"/>
+                </a:solidFill>
+                <a:latin typeface="Calibri"/>
+              </a:defRPr>
+            </a:pPr>
+            <a:r>
+              <a:t>4 · Physics-Based RUL Model</a:t>
             </a:r>
           </a:p>
         </p:txBody>
@@ -6306,8 +6866,8 @@
         </p:nvSpPr>
         <p:spPr>
           <a:xfrm>
-            <a:off x="502920" y="868680"/>
-            <a:ext cx="9144000" cy="365760"/>
+            <a:off x="685800" y="713232"/>
+            <a:ext cx="9601200" cy="320040"/>
           </a:xfrm>
           <a:prstGeom prst="rect">
             <a:avLst/>
@@ -6321,43 +6881,62 @@
           <a:lstStyle/>
           <a:p>
             <a:pPr>
-              <a:defRPr sz="1400">
-                <a:solidFill>
-                  <a:srgbClr val="666666"/>
-                </a:solidFill>
-                <a:latin typeface="Calibri"/>
-              </a:defRPr>
-            </a:pPr>
-            <a:r>
-              <a:t>"Digital representation throughout its lifecycle — does NOT replace testing"</a:t>
-            </a:r>
-          </a:p>
-        </p:txBody>
-      </p:sp>
-      <p:pic>
-        <p:nvPicPr>
-          <p:cNvPr id="6" name="Picture 5" descr="viz_lifecycle.png"/>
-          <p:cNvPicPr>
-            <a:picLocks noChangeAspect="1"/>
-          </p:cNvPicPr>
-          <p:nvPr/>
-        </p:nvPicPr>
-        <p:blipFill>
-          <a:blip r:embed="rId3"/>
-          <a:stretch>
-            <a:fillRect/>
-          </a:stretch>
-        </p:blipFill>
-        <p:spPr>
-          <a:xfrm>
-            <a:off x="502920" y="1234440"/>
-            <a:ext cx="11155680" cy="5149227"/>
-          </a:xfrm>
-          <a:prstGeom prst="rect">
-            <a:avLst/>
-          </a:prstGeom>
-        </p:spPr>
-      </p:pic>
+              <a:defRPr sz="1500">
+                <a:solidFill>
+                  <a:srgbClr val="FDD9C9"/>
+                </a:solidFill>
+                <a:latin typeface="Calibri"/>
+              </a:defRPr>
+            </a:pPr>
+            <a:r>
+              <a:t>Wind fatigue × thermal aging</a:t>
+            </a:r>
+          </a:p>
+        </p:txBody>
+      </p:sp>
+      <p:sp>
+        <p:nvSpPr>
+          <p:cNvPr id="6" name="Rectangle 5"/>
+          <p:cNvSpPr/>
+          <p:nvPr/>
+        </p:nvSpPr>
+        <p:spPr>
+          <a:xfrm>
+            <a:off x="0" y="1097280"/>
+            <a:ext cx="12191695" cy="5760720"/>
+          </a:xfrm>
+          <a:prstGeom prst="rect">
+            <a:avLst/>
+          </a:prstGeom>
+          <a:solidFill>
+            <a:srgbClr val="FFFFFF"/>
+          </a:solidFill>
+          <a:ln>
+            <a:noFill/>
+          </a:ln>
+        </p:spPr>
+        <p:style>
+          <a:lnRef idx="1">
+            <a:schemeClr val="accent1"/>
+          </a:lnRef>
+          <a:fillRef idx="3">
+            <a:schemeClr val="accent1"/>
+          </a:fillRef>
+          <a:effectRef idx="2">
+            <a:schemeClr val="accent1"/>
+          </a:effectRef>
+          <a:fontRef idx="minor">
+            <a:schemeClr val="lt1"/>
+          </a:fontRef>
+        </p:style>
+        <p:txBody>
+          <a:bodyPr rtlCol="0" anchor="ctr"/>
+          <a:lstStyle/>
+          <a:p>
+            <a:pPr algn="ctr"/>
+          </a:p>
+        </p:txBody>
+      </p:sp>
       <p:sp>
         <p:nvSpPr>
           <p:cNvPr id="7" name="TextBox 6"/>
@@ -6366,8 +6945,159 @@
         </p:nvSpPr>
         <p:spPr>
           <a:xfrm>
-            <a:off x="411480" y="6446520"/>
-            <a:ext cx="7315200" cy="320040"/>
+            <a:off x="685800" y="1325880"/>
+            <a:ext cx="10820095" cy="4937760"/>
+          </a:xfrm>
+          <a:prstGeom prst="rect">
+            <a:avLst/>
+          </a:prstGeom>
+          <a:noFill/>
+        </p:spPr>
+        <p:txBody>
+          <a:bodyPr wrap="square" anchor="t">
+            <a:spAutoFit/>
+          </a:bodyPr>
+          <a:lstStyle/>
+          <a:p>
+            <a:pPr>
+              <a:lnSpc>
+                <a:spcPct val="125000"/>
+              </a:lnSpc>
+              <a:spcAft>
+                <a:spcPts val="1400"/>
+              </a:spcAft>
+              <a:defRPr sz="2000">
+                <a:solidFill>
+                  <a:srgbClr val="2D2D2D"/>
+                </a:solidFill>
+                <a:latin typeface="Calibri"/>
+              </a:defRPr>
+            </a:pPr>
+            <a:r>
+              <a:t>RUL (days) = 175,200 / (f_wind × f_temp × 24)</a:t>
+            </a:r>
+          </a:p>
+          <a:p>
+            <a:pPr>
+              <a:spcAft>
+                <a:spcPts val="600"/>
+              </a:spcAft>
+            </a:pPr>
+          </a:p>
+          <a:p>
+            <a:pPr>
+              <a:lnSpc>
+                <a:spcPct val="125000"/>
+              </a:lnSpc>
+              <a:spcAft>
+                <a:spcPts val="1400"/>
+              </a:spcAft>
+              <a:defRPr sz="2000">
+                <a:solidFill>
+                  <a:srgbClr val="2D2D2D"/>
+                </a:solidFill>
+                <a:latin typeface="Calibri"/>
+              </a:defRPr>
+            </a:pPr>
+            <a:r>
+              <a:t>f_wind(v) = (v / 5)^1.6        f_temp(T) = 2^((T − 20) / 15)</a:t>
+            </a:r>
+          </a:p>
+          <a:p>
+            <a:pPr>
+              <a:spcAft>
+                <a:spcPts val="600"/>
+              </a:spcAft>
+            </a:pPr>
+          </a:p>
+          <a:p>
+            <a:pPr>
+              <a:lnSpc>
+                <a:spcPct val="125000"/>
+              </a:lnSpc>
+              <a:spcAft>
+                <a:spcPts val="1400"/>
+              </a:spcAft>
+              <a:defRPr sz="2000">
+                <a:solidFill>
+                  <a:srgbClr val="2D2D2D"/>
+                </a:solidFill>
+                <a:latin typeface="Calibri"/>
+              </a:defRPr>
+            </a:pPr>
+            <a:r>
+              <a:t>Verification sanity checks:</a:t>
+            </a:r>
+          </a:p>
+          <a:p>
+            <a:pPr>
+              <a:lnSpc>
+                <a:spcPct val="125000"/>
+              </a:lnSpc>
+              <a:spcAft>
+                <a:spcPts val="1400"/>
+              </a:spcAft>
+              <a:defRPr sz="2000">
+                <a:solidFill>
+                  <a:srgbClr val="2D2D2D"/>
+                </a:solidFill>
+                <a:latin typeface="Calibri"/>
+              </a:defRPr>
+            </a:pPr>
+            <a:r>
+              <a:t>   •  5 m/s, 20 °C  →  ~20 years</a:t>
+            </a:r>
+          </a:p>
+          <a:p>
+            <a:pPr>
+              <a:lnSpc>
+                <a:spcPct val="125000"/>
+              </a:lnSpc>
+              <a:spcAft>
+                <a:spcPts val="1400"/>
+              </a:spcAft>
+              <a:defRPr sz="2000">
+                <a:solidFill>
+                  <a:srgbClr val="2D2D2D"/>
+                </a:solidFill>
+                <a:latin typeface="Calibri"/>
+              </a:defRPr>
+            </a:pPr>
+            <a:r>
+              <a:t>   • 15 m/s, 35 °C  →  ~1.7 years</a:t>
+            </a:r>
+          </a:p>
+          <a:p>
+            <a:pPr>
+              <a:lnSpc>
+                <a:spcPct val="125000"/>
+              </a:lnSpc>
+              <a:spcAft>
+                <a:spcPts val="1400"/>
+              </a:spcAft>
+              <a:defRPr sz="2000">
+                <a:solidFill>
+                  <a:srgbClr val="2D2D2D"/>
+                </a:solidFill>
+                <a:latin typeface="Calibri"/>
+              </a:defRPr>
+            </a:pPr>
+            <a:r>
+              <a:t>   • 35 m/s, 65 °C  →  ~41 days</a:t>
+            </a:r>
+          </a:p>
+        </p:txBody>
+      </p:sp>
+      <p:sp>
+        <p:nvSpPr>
+          <p:cNvPr id="8" name="TextBox 7"/>
+          <p:cNvSpPr txBox="1"/>
+          <p:nvPr/>
+        </p:nvSpPr>
+        <p:spPr>
+          <a:xfrm>
+            <a:off x="685800" y="6473952"/>
+            <a:ext cx="9144000" cy="274320"/>
           </a:xfrm>
           <a:prstGeom prst="rect">
             <a:avLst/>
@@ -6383,7 +7113,7 @@
             <a:pPr>
               <a:defRPr sz="900">
                 <a:solidFill>
-                  <a:srgbClr val="666666"/>
+                  <a:srgbClr val="5A5A5A"/>
                 </a:solidFill>
                 <a:latin typeface="Calibri"/>
               </a:defRPr>
@@ -6396,14 +7126,14 @@
       </p:sp>
       <p:sp>
         <p:nvSpPr>
-          <p:cNvPr id="8" name="TextBox 7"/>
+          <p:cNvPr id="9" name="TextBox 8"/>
           <p:cNvSpPr txBox="1"/>
           <p:nvPr/>
         </p:nvSpPr>
         <p:spPr>
           <a:xfrm>
-            <a:off x="11155680" y="6446520"/>
-            <a:ext cx="731520" cy="320040"/>
+            <a:off x="11064240" y="6473952"/>
+            <a:ext cx="548640" cy="274320"/>
           </a:xfrm>
           <a:prstGeom prst="rect">
             <a:avLst/>
@@ -6419,7 +7149,7 @@
             <a:pPr algn="r">
               <a:defRPr sz="900">
                 <a:solidFill>
-                  <a:srgbClr val="666666"/>
+                  <a:srgbClr val="5A5A5A"/>
                 </a:solidFill>
                 <a:latin typeface="Calibri"/>
               </a:defRPr>
@@ -6448,9 +7178,52 @@
         <p:nvPr/>
       </p:nvGrpSpPr>
       <p:grpSpPr/>
+      <p:sp>
+        <p:nvSpPr>
+          <p:cNvPr id="2" name="Rectangle 1"/>
+          <p:cNvSpPr/>
+          <p:nvPr/>
+        </p:nvSpPr>
+        <p:spPr>
+          <a:xfrm>
+            <a:off x="0" y="0"/>
+            <a:ext cx="12191695" cy="1097280"/>
+          </a:xfrm>
+          <a:prstGeom prst="rect">
+            <a:avLst/>
+          </a:prstGeom>
+          <a:solidFill>
+            <a:srgbClr val="DF4707"/>
+          </a:solidFill>
+          <a:ln>
+            <a:noFill/>
+          </a:ln>
+        </p:spPr>
+        <p:style>
+          <a:lnRef idx="1">
+            <a:schemeClr val="accent1"/>
+          </a:lnRef>
+          <a:fillRef idx="3">
+            <a:schemeClr val="accent1"/>
+          </a:fillRef>
+          <a:effectRef idx="2">
+            <a:schemeClr val="accent1"/>
+          </a:effectRef>
+          <a:fontRef idx="minor">
+            <a:schemeClr val="lt1"/>
+          </a:fontRef>
+        </p:style>
+        <p:txBody>
+          <a:bodyPr rtlCol="0" anchor="ctr"/>
+          <a:lstStyle/>
+          <a:p>
+            <a:pPr algn="ctr"/>
+          </a:p>
+        </p:txBody>
+      </p:sp>
       <p:pic>
         <p:nvPicPr>
-          <p:cNvPr id="2" name="Picture 1" descr="section_01_problem.png"/>
+          <p:cNvPr id="3" name="Picture 2" descr="srh_logo_orange.png"/>
           <p:cNvPicPr>
             <a:picLocks noChangeAspect="1"/>
           </p:cNvPicPr>
@@ -6464,38 +7237,307 @@
         </p:blipFill>
         <p:spPr>
           <a:xfrm>
-            <a:off x="0" y="0"/>
-            <a:ext cx="12191695" cy="6858000"/>
+            <a:off x="10835640" y="256032"/>
+            <a:ext cx="1131570" cy="502920"/>
           </a:xfrm>
           <a:prstGeom prst="rect">
             <a:avLst/>
           </a:prstGeom>
         </p:spPr>
       </p:pic>
-      <p:pic>
-        <p:nvPicPr>
-          <p:cNvPr id="3" name="Picture 2" descr="srh_logo_white.png"/>
-          <p:cNvPicPr>
-            <a:picLocks noChangeAspect="1"/>
-          </p:cNvPicPr>
-          <p:nvPr/>
-        </p:nvPicPr>
-        <p:blipFill>
-          <a:blip r:embed="rId3"/>
-          <a:stretch>
-            <a:fillRect/>
-          </a:stretch>
-        </p:blipFill>
-        <p:spPr>
-          <a:xfrm>
-            <a:off x="10972800" y="320040"/>
-            <a:ext cx="650328" cy="502920"/>
-          </a:xfrm>
-          <a:prstGeom prst="rect">
-            <a:avLst/>
-          </a:prstGeom>
-        </p:spPr>
-      </p:pic>
+      <p:sp>
+        <p:nvSpPr>
+          <p:cNvPr id="4" name="TextBox 3"/>
+          <p:cNvSpPr txBox="1"/>
+          <p:nvPr/>
+        </p:nvSpPr>
+        <p:spPr>
+          <a:xfrm>
+            <a:off x="685800" y="201168"/>
+            <a:ext cx="9601200" cy="502920"/>
+          </a:xfrm>
+          <a:prstGeom prst="rect">
+            <a:avLst/>
+          </a:prstGeom>
+          <a:noFill/>
+        </p:spPr>
+        <p:txBody>
+          <a:bodyPr wrap="none">
+            <a:spAutoFit/>
+          </a:bodyPr>
+          <a:lstStyle/>
+          <a:p>
+            <a:pPr>
+              <a:defRPr sz="3000" b="1">
+                <a:solidFill>
+                  <a:srgbClr val="FFFFFF"/>
+                </a:solidFill>
+                <a:latin typeface="Calibri"/>
+              </a:defRPr>
+            </a:pPr>
+            <a:r>
+              <a:t>5 · Design of Experiments</a:t>
+            </a:r>
+          </a:p>
+        </p:txBody>
+      </p:sp>
+      <p:sp>
+        <p:nvSpPr>
+          <p:cNvPr id="5" name="TextBox 4"/>
+          <p:cNvSpPr txBox="1"/>
+          <p:nvPr/>
+        </p:nvSpPr>
+        <p:spPr>
+          <a:xfrm>
+            <a:off x="685800" y="713232"/>
+            <a:ext cx="9601200" cy="320040"/>
+          </a:xfrm>
+          <a:prstGeom prst="rect">
+            <a:avLst/>
+          </a:prstGeom>
+          <a:noFill/>
+        </p:spPr>
+        <p:txBody>
+          <a:bodyPr wrap="none">
+            <a:spAutoFit/>
+          </a:bodyPr>
+          <a:lstStyle/>
+          <a:p>
+            <a:pPr>
+              <a:defRPr sz="1500">
+                <a:solidFill>
+                  <a:srgbClr val="FDD9C9"/>
+                </a:solidFill>
+                <a:latin typeface="Calibri"/>
+              </a:defRPr>
+            </a:pPr>
+            <a:r>
+              <a:t>Full factorial — same workflow as HEEDS Example 5 (Coil Spring)</a:t>
+            </a:r>
+          </a:p>
+        </p:txBody>
+      </p:sp>
+      <p:sp>
+        <p:nvSpPr>
+          <p:cNvPr id="6" name="Rectangle 5"/>
+          <p:cNvSpPr/>
+          <p:nvPr/>
+        </p:nvSpPr>
+        <p:spPr>
+          <a:xfrm>
+            <a:off x="0" y="1097280"/>
+            <a:ext cx="12191695" cy="5760720"/>
+          </a:xfrm>
+          <a:prstGeom prst="rect">
+            <a:avLst/>
+          </a:prstGeom>
+          <a:solidFill>
+            <a:srgbClr val="FFFFFF"/>
+          </a:solidFill>
+          <a:ln>
+            <a:noFill/>
+          </a:ln>
+        </p:spPr>
+        <p:style>
+          <a:lnRef idx="1">
+            <a:schemeClr val="accent1"/>
+          </a:lnRef>
+          <a:fillRef idx="3">
+            <a:schemeClr val="accent1"/>
+          </a:fillRef>
+          <a:effectRef idx="2">
+            <a:schemeClr val="accent1"/>
+          </a:effectRef>
+          <a:fontRef idx="minor">
+            <a:schemeClr val="lt1"/>
+          </a:fontRef>
+        </p:style>
+        <p:txBody>
+          <a:bodyPr rtlCol="0" anchor="ctr"/>
+          <a:lstStyle/>
+          <a:p>
+            <a:pPr algn="ctr"/>
+          </a:p>
+        </p:txBody>
+      </p:sp>
+      <p:sp>
+        <p:nvSpPr>
+          <p:cNvPr id="7" name="TextBox 6"/>
+          <p:cNvSpPr txBox="1"/>
+          <p:nvPr/>
+        </p:nvSpPr>
+        <p:spPr>
+          <a:xfrm>
+            <a:off x="685800" y="1325880"/>
+            <a:ext cx="10820095" cy="4937760"/>
+          </a:xfrm>
+          <a:prstGeom prst="rect">
+            <a:avLst/>
+          </a:prstGeom>
+          <a:noFill/>
+        </p:spPr>
+        <p:txBody>
+          <a:bodyPr wrap="square" anchor="t">
+            <a:spAutoFit/>
+          </a:bodyPr>
+          <a:lstStyle/>
+          <a:p>
+            <a:pPr>
+              <a:lnSpc>
+                <a:spcPct val="125000"/>
+              </a:lnSpc>
+              <a:spcAft>
+                <a:spcPts val="1400"/>
+              </a:spcAft>
+              <a:defRPr sz="2000">
+                <a:solidFill>
+                  <a:srgbClr val="2D2D2D"/>
+                </a:solidFill>
+                <a:latin typeface="Calibri"/>
+              </a:defRPr>
+            </a:pPr>
+            <a:r>
+              <a:t>Factor A: Wind speed — 4 levels [5, 15, 25, 35] m/s</a:t>
+            </a:r>
+          </a:p>
+          <a:p>
+            <a:pPr>
+              <a:lnSpc>
+                <a:spcPct val="125000"/>
+              </a:lnSpc>
+              <a:spcAft>
+                <a:spcPts val="1400"/>
+              </a:spcAft>
+              <a:defRPr sz="2000">
+                <a:solidFill>
+                  <a:srgbClr val="2D2D2D"/>
+                </a:solidFill>
+                <a:latin typeface="Calibri"/>
+              </a:defRPr>
+            </a:pPr>
+            <a:r>
+              <a:t>Factor B: Temperature — 10 levels [20…65] °C</a:t>
+            </a:r>
+          </a:p>
+          <a:p>
+            <a:pPr>
+              <a:lnSpc>
+                <a:spcPct val="125000"/>
+              </a:lnSpc>
+              <a:spcAft>
+                <a:spcPts val="1400"/>
+              </a:spcAft>
+              <a:defRPr sz="2000">
+                <a:solidFill>
+                  <a:srgbClr val="2D2D2D"/>
+                </a:solidFill>
+                <a:latin typeface="Calibri"/>
+              </a:defRPr>
+            </a:pPr>
+            <a:r>
+              <a:t>Design: 4 × 10 = 40 simulation runs</a:t>
+            </a:r>
+          </a:p>
+          <a:p>
+            <a:pPr>
+              <a:spcAft>
+                <a:spcPts val="600"/>
+              </a:spcAft>
+            </a:pPr>
+          </a:p>
+          <a:p>
+            <a:pPr>
+              <a:lnSpc>
+                <a:spcPct val="125000"/>
+              </a:lnSpc>
+              <a:spcAft>
+                <a:spcPts val="1400"/>
+              </a:spcAft>
+              <a:defRPr sz="2000">
+                <a:solidFill>
+                  <a:srgbClr val="2D2D2D"/>
+                </a:solidFill>
+                <a:latin typeface="Calibri"/>
+              </a:defRPr>
+            </a:pPr>
+            <a:r>
+              <a:t>HEEDS workflow: Process → Parameters → Tagging → Study → Run → POST</a:t>
+            </a:r>
+          </a:p>
+        </p:txBody>
+      </p:sp>
+      <p:sp>
+        <p:nvSpPr>
+          <p:cNvPr id="8" name="TextBox 7"/>
+          <p:cNvSpPr txBox="1"/>
+          <p:nvPr/>
+        </p:nvSpPr>
+        <p:spPr>
+          <a:xfrm>
+            <a:off x="685800" y="6473952"/>
+            <a:ext cx="9144000" cy="274320"/>
+          </a:xfrm>
+          <a:prstGeom prst="rect">
+            <a:avLst/>
+          </a:prstGeom>
+          <a:noFill/>
+        </p:spPr>
+        <p:txBody>
+          <a:bodyPr wrap="none">
+            <a:spAutoFit/>
+          </a:bodyPr>
+          <a:lstStyle/>
+          <a:p>
+            <a:pPr>
+              <a:defRPr sz="900">
+                <a:solidFill>
+                  <a:srgbClr val="5A5A5A"/>
+                </a:solidFill>
+                <a:latin typeface="Calibri"/>
+              </a:defRPr>
+            </a:pPr>
+            <a:r>
+              <a:t>SRH University  ·  Prof. Dr. Adele Nasti</a:t>
+            </a:r>
+          </a:p>
+        </p:txBody>
+      </p:sp>
+      <p:sp>
+        <p:nvSpPr>
+          <p:cNvPr id="9" name="TextBox 8"/>
+          <p:cNvSpPr txBox="1"/>
+          <p:nvPr/>
+        </p:nvSpPr>
+        <p:spPr>
+          <a:xfrm>
+            <a:off x="11064240" y="6473952"/>
+            <a:ext cx="548640" cy="274320"/>
+          </a:xfrm>
+          <a:prstGeom prst="rect">
+            <a:avLst/>
+          </a:prstGeom>
+          <a:noFill/>
+        </p:spPr>
+        <p:txBody>
+          <a:bodyPr wrap="none">
+            <a:spAutoFit/>
+          </a:bodyPr>
+          <a:lstStyle/>
+          <a:p>
+            <a:pPr algn="r">
+              <a:defRPr sz="900">
+                <a:solidFill>
+                  <a:srgbClr val="5A5A5A"/>
+                </a:solidFill>
+                <a:latin typeface="Calibri"/>
+              </a:defRPr>
+            </a:pPr>
+            <a:r>
+              <a:t>6</a:t>
+            </a:r>
+          </a:p>
+        </p:txBody>
+      </p:sp>
     </p:spTree>
   </p:cSld>
   <p:clrMapOvr>
@@ -6523,13 +7565,13 @@
         <p:spPr>
           <a:xfrm>
             <a:off x="0" y="0"/>
-            <a:ext cx="12191695" cy="6858000"/>
+            <a:ext cx="12191695" cy="1097280"/>
           </a:xfrm>
           <a:prstGeom prst="rect">
             <a:avLst/>
           </a:prstGeom>
           <a:solidFill>
-            <a:srgbClr val="FFFFFF"/>
+            <a:srgbClr val="DF4707"/>
           </a:solidFill>
           <a:ln>
             <a:noFill/>
@@ -6573,8 +7615,8 @@
         </p:blipFill>
         <p:spPr>
           <a:xfrm>
-            <a:off x="10698480" y="256032"/>
-            <a:ext cx="864108" cy="384048"/>
+            <a:off x="10835640" y="256032"/>
+            <a:ext cx="1131570" cy="502920"/>
           </a:xfrm>
           <a:prstGeom prst="rect">
             <a:avLst/>
@@ -6589,8 +7631,8 @@
         </p:nvSpPr>
         <p:spPr>
           <a:xfrm>
-            <a:off x="502920" y="320040"/>
-            <a:ext cx="9144000" cy="502920"/>
+            <a:off x="685800" y="201168"/>
+            <a:ext cx="9601200" cy="502920"/>
           </a:xfrm>
           <a:prstGeom prst="rect">
             <a:avLst/>
@@ -6604,15 +7646,15 @@
           <a:lstStyle/>
           <a:p>
             <a:pPr>
-              <a:defRPr sz="2600" b="1">
-                <a:solidFill>
-                  <a:srgbClr val="2D2D2D"/>
-                </a:solidFill>
-                <a:latin typeface="Calibri"/>
-              </a:defRPr>
-            </a:pPr>
-            <a:r>
-              <a:t>End-to-End Approach</a:t>
+              <a:defRPr sz="3000" b="1">
+                <a:solidFill>
+                  <a:srgbClr val="FFFFFF"/>
+                </a:solidFill>
+                <a:latin typeface="Calibri"/>
+              </a:defRPr>
+            </a:pPr>
+            <a:r>
+              <a:t>6 · DoE Results — Design Space</a:t>
             </a:r>
           </a:p>
         </p:txBody>
@@ -6625,8 +7667,8 @@
         </p:nvSpPr>
         <p:spPr>
           <a:xfrm>
-            <a:off x="502920" y="868680"/>
-            <a:ext cx="9144000" cy="365760"/>
+            <a:off x="685800" y="713232"/>
+            <a:ext cx="9601200" cy="320040"/>
           </a:xfrm>
           <a:prstGeom prst="rect">
             <a:avLst/>
@@ -6640,22 +7682,65 @@
           <a:lstStyle/>
           <a:p>
             <a:pPr>
-              <a:defRPr sz="1400">
-                <a:solidFill>
-                  <a:srgbClr val="666666"/>
-                </a:solidFill>
-                <a:latin typeface="Calibri"/>
-              </a:defRPr>
-            </a:pPr>
-            <a:r>
-              <a:t>Drone geometry + physics-based RUL + DoE</a:t>
-            </a:r>
+              <a:defRPr sz="1500">
+                <a:solidFill>
+                  <a:srgbClr val="FDD9C9"/>
+                </a:solidFill>
+                <a:latin typeface="Calibri"/>
+              </a:defRPr>
+            </a:pPr>
+            <a:r>
+              <a:t>40-run factorial heatmap</a:t>
+            </a:r>
+          </a:p>
+        </p:txBody>
+      </p:sp>
+      <p:sp>
+        <p:nvSpPr>
+          <p:cNvPr id="6" name="Rectangle 5"/>
+          <p:cNvSpPr/>
+          <p:nvPr/>
+        </p:nvSpPr>
+        <p:spPr>
+          <a:xfrm>
+            <a:off x="0" y="1097280"/>
+            <a:ext cx="12191695" cy="5760720"/>
+          </a:xfrm>
+          <a:prstGeom prst="rect">
+            <a:avLst/>
+          </a:prstGeom>
+          <a:solidFill>
+            <a:srgbClr val="FFFFFF"/>
+          </a:solidFill>
+          <a:ln>
+            <a:noFill/>
+          </a:ln>
+        </p:spPr>
+        <p:style>
+          <a:lnRef idx="1">
+            <a:schemeClr val="accent1"/>
+          </a:lnRef>
+          <a:fillRef idx="3">
+            <a:schemeClr val="accent1"/>
+          </a:fillRef>
+          <a:effectRef idx="2">
+            <a:schemeClr val="accent1"/>
+          </a:effectRef>
+          <a:fontRef idx="minor">
+            <a:schemeClr val="lt1"/>
+          </a:fontRef>
+        </p:style>
+        <p:txBody>
+          <a:bodyPr rtlCol="0" anchor="ctr"/>
+          <a:lstStyle/>
+          <a:p>
+            <a:pPr algn="ctr"/>
           </a:p>
         </p:txBody>
       </p:sp>
       <p:pic>
         <p:nvPicPr>
-          <p:cNvPr id="6" name="Picture 5" descr="viz_workflow.png"/>
+          <p:cNvPr id="7" name="Picture 6" descr="05_doe_heatmap.png"/>
           <p:cNvPicPr>
             <a:picLocks noChangeAspect="1"/>
           </p:cNvPicPr>
@@ -6669,8 +7754,8 @@
         </p:blipFill>
         <p:spPr>
           <a:xfrm>
-            <a:off x="502920" y="1234440"/>
-            <a:ext cx="11155680" cy="3851645"/>
+            <a:off x="2666473" y="1417320"/>
+            <a:ext cx="6858747" cy="4389120"/>
           </a:xfrm>
           <a:prstGeom prst="rect">
             <a:avLst/>
@@ -6679,14 +7764,14 @@
       </p:pic>
       <p:sp>
         <p:nvSpPr>
-          <p:cNvPr id="7" name="TextBox 6"/>
+          <p:cNvPr id="8" name="TextBox 7"/>
           <p:cNvSpPr txBox="1"/>
           <p:nvPr/>
         </p:nvSpPr>
         <p:spPr>
           <a:xfrm>
-            <a:off x="411480" y="6446520"/>
-            <a:ext cx="7315200" cy="320040"/>
+            <a:off x="685800" y="5879592"/>
+            <a:ext cx="10820095" cy="365760"/>
           </a:xfrm>
           <a:prstGeom prst="rect">
             <a:avLst/>
@@ -6700,29 +7785,29 @@
           <a:lstStyle/>
           <a:p>
             <a:pPr>
-              <a:defRPr sz="900">
-                <a:solidFill>
-                  <a:srgbClr val="666666"/>
-                </a:solidFill>
-                <a:latin typeface="Calibri"/>
-              </a:defRPr>
-            </a:pPr>
-            <a:r>
-              <a:t>SRH University  ·  Prof. Dr. Adele Nasti</a:t>
-            </a:r>
-          </a:p>
-        </p:txBody>
-      </p:sp>
-      <p:sp>
-        <p:nvSpPr>
-          <p:cNvPr id="8" name="TextBox 7"/>
+              <a:defRPr sz="1300" i="1">
+                <a:solidFill>
+                  <a:srgbClr val="5A5A5A"/>
+                </a:solidFill>
+                <a:latin typeface="Calibri"/>
+              </a:defRPr>
+            </a:pPr>
+            <a:r>
+              <a:t>RUL (years) across wind × temperature</a:t>
+            </a:r>
+          </a:p>
+        </p:txBody>
+      </p:sp>
+      <p:sp>
+        <p:nvSpPr>
+          <p:cNvPr id="9" name="TextBox 8"/>
           <p:cNvSpPr txBox="1"/>
           <p:nvPr/>
         </p:nvSpPr>
         <p:spPr>
           <a:xfrm>
-            <a:off x="11155680" y="6446520"/>
-            <a:ext cx="731520" cy="320040"/>
+            <a:off x="685800" y="6473952"/>
+            <a:ext cx="9144000" cy="274320"/>
           </a:xfrm>
           <a:prstGeom prst="rect">
             <a:avLst/>
@@ -6735,10 +7820,46 @@
           </a:bodyPr>
           <a:lstStyle/>
           <a:p>
+            <a:pPr>
+              <a:defRPr sz="900">
+                <a:solidFill>
+                  <a:srgbClr val="5A5A5A"/>
+                </a:solidFill>
+                <a:latin typeface="Calibri"/>
+              </a:defRPr>
+            </a:pPr>
+            <a:r>
+              <a:t>SRH University  ·  Prof. Dr. Adele Nasti</a:t>
+            </a:r>
+          </a:p>
+        </p:txBody>
+      </p:sp>
+      <p:sp>
+        <p:nvSpPr>
+          <p:cNvPr id="10" name="TextBox 9"/>
+          <p:cNvSpPr txBox="1"/>
+          <p:nvPr/>
+        </p:nvSpPr>
+        <p:spPr>
+          <a:xfrm>
+            <a:off x="11064240" y="6473952"/>
+            <a:ext cx="548640" cy="274320"/>
+          </a:xfrm>
+          <a:prstGeom prst="rect">
+            <a:avLst/>
+          </a:prstGeom>
+          <a:noFill/>
+        </p:spPr>
+        <p:txBody>
+          <a:bodyPr wrap="none">
+            <a:spAutoFit/>
+          </a:bodyPr>
+          <a:lstStyle/>
+          <a:p>
             <a:pPr algn="r">
               <a:defRPr sz="900">
                 <a:solidFill>
-                  <a:srgbClr val="666666"/>
+                  <a:srgbClr val="5A5A5A"/>
                 </a:solidFill>
                 <a:latin typeface="Calibri"/>
               </a:defRPr>
@@ -6767,9 +7888,52 @@
         <p:nvPr/>
       </p:nvGrpSpPr>
       <p:grpSpPr/>
+      <p:sp>
+        <p:nvSpPr>
+          <p:cNvPr id="2" name="Rectangle 1"/>
+          <p:cNvSpPr/>
+          <p:nvPr/>
+        </p:nvSpPr>
+        <p:spPr>
+          <a:xfrm>
+            <a:off x="0" y="0"/>
+            <a:ext cx="12191695" cy="1097280"/>
+          </a:xfrm>
+          <a:prstGeom prst="rect">
+            <a:avLst/>
+          </a:prstGeom>
+          <a:solidFill>
+            <a:srgbClr val="DF4707"/>
+          </a:solidFill>
+          <a:ln>
+            <a:noFill/>
+          </a:ln>
+        </p:spPr>
+        <p:style>
+          <a:lnRef idx="1">
+            <a:schemeClr val="accent1"/>
+          </a:lnRef>
+          <a:fillRef idx="3">
+            <a:schemeClr val="accent1"/>
+          </a:fillRef>
+          <a:effectRef idx="2">
+            <a:schemeClr val="accent1"/>
+          </a:effectRef>
+          <a:fontRef idx="minor">
+            <a:schemeClr val="lt1"/>
+          </a:fontRef>
+        </p:style>
+        <p:txBody>
+          <a:bodyPr rtlCol="0" anchor="ctr"/>
+          <a:lstStyle/>
+          <a:p>
+            <a:pPr algn="ctr"/>
+          </a:p>
+        </p:txBody>
+      </p:sp>
       <p:pic>
         <p:nvPicPr>
-          <p:cNvPr id="2" name="Picture 1" descr="section_01_problem.png"/>
+          <p:cNvPr id="3" name="Picture 2" descr="srh_logo_orange.png"/>
           <p:cNvPicPr>
             <a:picLocks noChangeAspect="1"/>
           </p:cNvPicPr>
@@ -6783,17 +7947,132 @@
         </p:blipFill>
         <p:spPr>
           <a:xfrm>
-            <a:off x="0" y="0"/>
-            <a:ext cx="12191695" cy="6858000"/>
+            <a:off x="10835640" y="256032"/>
+            <a:ext cx="1131570" cy="502920"/>
           </a:xfrm>
           <a:prstGeom prst="rect">
             <a:avLst/>
           </a:prstGeom>
         </p:spPr>
       </p:pic>
+      <p:sp>
+        <p:nvSpPr>
+          <p:cNvPr id="4" name="TextBox 3"/>
+          <p:cNvSpPr txBox="1"/>
+          <p:nvPr/>
+        </p:nvSpPr>
+        <p:spPr>
+          <a:xfrm>
+            <a:off x="685800" y="201168"/>
+            <a:ext cx="9601200" cy="502920"/>
+          </a:xfrm>
+          <a:prstGeom prst="rect">
+            <a:avLst/>
+          </a:prstGeom>
+          <a:noFill/>
+        </p:spPr>
+        <p:txBody>
+          <a:bodyPr wrap="none">
+            <a:spAutoFit/>
+          </a:bodyPr>
+          <a:lstStyle/>
+          <a:p>
+            <a:pPr>
+              <a:defRPr sz="3000" b="1">
+                <a:solidFill>
+                  <a:srgbClr val="FFFFFF"/>
+                </a:solidFill>
+                <a:latin typeface="Calibri"/>
+              </a:defRPr>
+            </a:pPr>
+            <a:r>
+              <a:t>7 · RUL vs Temperature</a:t>
+            </a:r>
+          </a:p>
+        </p:txBody>
+      </p:sp>
+      <p:sp>
+        <p:nvSpPr>
+          <p:cNvPr id="5" name="TextBox 4"/>
+          <p:cNvSpPr txBox="1"/>
+          <p:nvPr/>
+        </p:nvSpPr>
+        <p:spPr>
+          <a:xfrm>
+            <a:off x="685800" y="713232"/>
+            <a:ext cx="9601200" cy="320040"/>
+          </a:xfrm>
+          <a:prstGeom prst="rect">
+            <a:avLst/>
+          </a:prstGeom>
+          <a:noFill/>
+        </p:spPr>
+        <p:txBody>
+          <a:bodyPr wrap="none">
+            <a:spAutoFit/>
+          </a:bodyPr>
+          <a:lstStyle/>
+          <a:p>
+            <a:pPr>
+              <a:defRPr sz="1500">
+                <a:solidFill>
+                  <a:srgbClr val="FDD9C9"/>
+                </a:solidFill>
+                <a:latin typeface="Calibri"/>
+              </a:defRPr>
+            </a:pPr>
+            <a:r>
+              <a:t>Separate curve for each wind level</a:t>
+            </a:r>
+          </a:p>
+        </p:txBody>
+      </p:sp>
+      <p:sp>
+        <p:nvSpPr>
+          <p:cNvPr id="6" name="Rectangle 5"/>
+          <p:cNvSpPr/>
+          <p:nvPr/>
+        </p:nvSpPr>
+        <p:spPr>
+          <a:xfrm>
+            <a:off x="0" y="1097280"/>
+            <a:ext cx="12191695" cy="5760720"/>
+          </a:xfrm>
+          <a:prstGeom prst="rect">
+            <a:avLst/>
+          </a:prstGeom>
+          <a:solidFill>
+            <a:srgbClr val="FFFFFF"/>
+          </a:solidFill>
+          <a:ln>
+            <a:noFill/>
+          </a:ln>
+        </p:spPr>
+        <p:style>
+          <a:lnRef idx="1">
+            <a:schemeClr val="accent1"/>
+          </a:lnRef>
+          <a:fillRef idx="3">
+            <a:schemeClr val="accent1"/>
+          </a:fillRef>
+          <a:effectRef idx="2">
+            <a:schemeClr val="accent1"/>
+          </a:effectRef>
+          <a:fontRef idx="minor">
+            <a:schemeClr val="lt1"/>
+          </a:fontRef>
+        </p:style>
+        <p:txBody>
+          <a:bodyPr rtlCol="0" anchor="ctr"/>
+          <a:lstStyle/>
+          <a:p>
+            <a:pPr algn="ctr"/>
+          </a:p>
+        </p:txBody>
+      </p:sp>
       <p:pic>
         <p:nvPicPr>
-          <p:cNvPr id="3" name="Picture 2" descr="srh_logo_white.png"/>
+          <p:cNvPr id="7" name="Picture 6" descr="01_rul_curves.png"/>
           <p:cNvPicPr>
             <a:picLocks noChangeAspect="1"/>
           </p:cNvPicPr>
@@ -6807,14 +8086,122 @@
         </p:blipFill>
         <p:spPr>
           <a:xfrm>
-            <a:off x="10972800" y="320040"/>
-            <a:ext cx="650328" cy="502920"/>
+            <a:off x="2115781" y="1417320"/>
+            <a:ext cx="7960131" cy="4389120"/>
           </a:xfrm>
           <a:prstGeom prst="rect">
             <a:avLst/>
           </a:prstGeom>
         </p:spPr>
       </p:pic>
+      <p:sp>
+        <p:nvSpPr>
+          <p:cNvPr id="8" name="TextBox 7"/>
+          <p:cNvSpPr txBox="1"/>
+          <p:nvPr/>
+        </p:nvSpPr>
+        <p:spPr>
+          <a:xfrm>
+            <a:off x="685800" y="5879592"/>
+            <a:ext cx="10820095" cy="365760"/>
+          </a:xfrm>
+          <a:prstGeom prst="rect">
+            <a:avLst/>
+          </a:prstGeom>
+          <a:noFill/>
+        </p:spPr>
+        <p:txBody>
+          <a:bodyPr wrap="none">
+            <a:spAutoFit/>
+          </a:bodyPr>
+          <a:lstStyle/>
+          <a:p>
+            <a:pPr>
+              <a:defRPr sz="1300" i="1">
+                <a:solidFill>
+                  <a:srgbClr val="5A5A5A"/>
+                </a:solidFill>
+                <a:latin typeface="Calibri"/>
+              </a:defRPr>
+            </a:pPr>
+            <a:r>
+              <a:t>Higher wind collapses remaining life — dominant degradation driver</a:t>
+            </a:r>
+          </a:p>
+        </p:txBody>
+      </p:sp>
+      <p:sp>
+        <p:nvSpPr>
+          <p:cNvPr id="9" name="TextBox 8"/>
+          <p:cNvSpPr txBox="1"/>
+          <p:nvPr/>
+        </p:nvSpPr>
+        <p:spPr>
+          <a:xfrm>
+            <a:off x="685800" y="6473952"/>
+            <a:ext cx="9144000" cy="274320"/>
+          </a:xfrm>
+          <a:prstGeom prst="rect">
+            <a:avLst/>
+          </a:prstGeom>
+          <a:noFill/>
+        </p:spPr>
+        <p:txBody>
+          <a:bodyPr wrap="none">
+            <a:spAutoFit/>
+          </a:bodyPr>
+          <a:lstStyle/>
+          <a:p>
+            <a:pPr>
+              <a:defRPr sz="900">
+                <a:solidFill>
+                  <a:srgbClr val="5A5A5A"/>
+                </a:solidFill>
+                <a:latin typeface="Calibri"/>
+              </a:defRPr>
+            </a:pPr>
+            <a:r>
+              <a:t>SRH University  ·  Prof. Dr. Adele Nasti</a:t>
+            </a:r>
+          </a:p>
+        </p:txBody>
+      </p:sp>
+      <p:sp>
+        <p:nvSpPr>
+          <p:cNvPr id="10" name="TextBox 9"/>
+          <p:cNvSpPr txBox="1"/>
+          <p:nvPr/>
+        </p:nvSpPr>
+        <p:spPr>
+          <a:xfrm>
+            <a:off x="11064240" y="6473952"/>
+            <a:ext cx="548640" cy="274320"/>
+          </a:xfrm>
+          <a:prstGeom prst="rect">
+            <a:avLst/>
+          </a:prstGeom>
+          <a:noFill/>
+        </p:spPr>
+        <p:txBody>
+          <a:bodyPr wrap="none">
+            <a:spAutoFit/>
+          </a:bodyPr>
+          <a:lstStyle/>
+          <a:p>
+            <a:pPr algn="r">
+              <a:defRPr sz="900">
+                <a:solidFill>
+                  <a:srgbClr val="5A5A5A"/>
+                </a:solidFill>
+                <a:latin typeface="Calibri"/>
+              </a:defRPr>
+            </a:pPr>
+            <a:r>
+              <a:t>8</a:t>
+            </a:r>
+          </a:p>
+        </p:txBody>
+      </p:sp>
     </p:spTree>
   </p:cSld>
   <p:clrMapOvr>
@@ -6842,13 +8229,13 @@
         <p:spPr>
           <a:xfrm>
             <a:off x="0" y="0"/>
-            <a:ext cx="12191695" cy="6858000"/>
+            <a:ext cx="12191695" cy="1097280"/>
           </a:xfrm>
           <a:prstGeom prst="rect">
             <a:avLst/>
           </a:prstGeom>
           <a:solidFill>
-            <a:srgbClr val="FFFFFF"/>
+            <a:srgbClr val="DF4707"/>
           </a:solidFill>
           <a:ln>
             <a:noFill/>
@@ -6892,8 +8279,8 @@
         </p:blipFill>
         <p:spPr>
           <a:xfrm>
-            <a:off x="10698480" y="256032"/>
-            <a:ext cx="864108" cy="384048"/>
+            <a:off x="10835640" y="256032"/>
+            <a:ext cx="1131570" cy="502920"/>
           </a:xfrm>
           <a:prstGeom prst="rect">
             <a:avLst/>
@@ -6908,8 +8295,8 @@
         </p:nvSpPr>
         <p:spPr>
           <a:xfrm>
-            <a:off x="502920" y="320040"/>
-            <a:ext cx="9144000" cy="502920"/>
+            <a:off x="685800" y="201168"/>
+            <a:ext cx="9601200" cy="502920"/>
           </a:xfrm>
           <a:prstGeom prst="rect">
             <a:avLst/>
@@ -6923,15 +8310,15 @@
           <a:lstStyle/>
           <a:p>
             <a:pPr>
-              <a:defRPr sz="2600" b="1">
-                <a:solidFill>
-                  <a:srgbClr val="2D2D2D"/>
-                </a:solidFill>
-                <a:latin typeface="Calibri"/>
-              </a:defRPr>
-            </a:pPr>
-            <a:r>
-              <a:t>Physics-Based RUL Model</a:t>
+              <a:defRPr sz="3000" b="1">
+                <a:solidFill>
+                  <a:srgbClr val="FFFFFF"/>
+                </a:solidFill>
+                <a:latin typeface="Calibri"/>
+              </a:defRPr>
+            </a:pPr>
+            <a:r>
+              <a:t>8 · Sensitivity Analysis</a:t>
             </a:r>
           </a:p>
         </p:txBody>
@@ -6944,8 +8331,8 @@
         </p:nvSpPr>
         <p:spPr>
           <a:xfrm>
-            <a:off x="502920" y="868680"/>
-            <a:ext cx="9144000" cy="365760"/>
+            <a:off x="685800" y="713232"/>
+            <a:ext cx="9601200" cy="320040"/>
           </a:xfrm>
           <a:prstGeom prst="rect">
             <a:avLst/>
@@ -6959,22 +8346,65 @@
           <a:lstStyle/>
           <a:p>
             <a:pPr>
-              <a:defRPr sz="1400">
-                <a:solidFill>
-                  <a:srgbClr val="666666"/>
-                </a:solidFill>
-                <a:latin typeface="Calibri"/>
-              </a:defRPr>
-            </a:pPr>
-            <a:r>
-              <a:t>Wind fatigue × thermal aging</a:t>
-            </a:r>
+              <a:defRPr sz="1500">
+                <a:solidFill>
+                  <a:srgbClr val="FDD9C9"/>
+                </a:solidFill>
+                <a:latin typeface="Calibri"/>
+              </a:defRPr>
+            </a:pPr>
+            <a:r>
+              <a:t>Pareto ranking of factors</a:t>
+            </a:r>
+          </a:p>
+        </p:txBody>
+      </p:sp>
+      <p:sp>
+        <p:nvSpPr>
+          <p:cNvPr id="6" name="Rectangle 5"/>
+          <p:cNvSpPr/>
+          <p:nvPr/>
+        </p:nvSpPr>
+        <p:spPr>
+          <a:xfrm>
+            <a:off x="0" y="1097280"/>
+            <a:ext cx="12191695" cy="5760720"/>
+          </a:xfrm>
+          <a:prstGeom prst="rect">
+            <a:avLst/>
+          </a:prstGeom>
+          <a:solidFill>
+            <a:srgbClr val="FFFFFF"/>
+          </a:solidFill>
+          <a:ln>
+            <a:noFill/>
+          </a:ln>
+        </p:spPr>
+        <p:style>
+          <a:lnRef idx="1">
+            <a:schemeClr val="accent1"/>
+          </a:lnRef>
+          <a:fillRef idx="3">
+            <a:schemeClr val="accent1"/>
+          </a:fillRef>
+          <a:effectRef idx="2">
+            <a:schemeClr val="accent1"/>
+          </a:effectRef>
+          <a:fontRef idx="minor">
+            <a:schemeClr val="lt1"/>
+          </a:fontRef>
+        </p:style>
+        <p:txBody>
+          <a:bodyPr rtlCol="0" anchor="ctr"/>
+          <a:lstStyle/>
+          <a:p>
+            <a:pPr algn="ctr"/>
           </a:p>
         </p:txBody>
       </p:sp>
       <p:pic>
         <p:nvPicPr>
-          <p:cNvPr id="6" name="Picture 5" descr="viz_formula.png"/>
+          <p:cNvPr id="7" name="Picture 6" descr="03_pareto_sensitivity.png"/>
           <p:cNvPicPr>
             <a:picLocks noChangeAspect="1"/>
           </p:cNvPicPr>
@@ -6988,8 +8418,8 @@
         </p:blipFill>
         <p:spPr>
           <a:xfrm>
-            <a:off x="502920" y="1234440"/>
-            <a:ext cx="11155680" cy="5686659"/>
+            <a:off x="2115781" y="1417320"/>
+            <a:ext cx="7960131" cy="4389120"/>
           </a:xfrm>
           <a:prstGeom prst="rect">
             <a:avLst/>
@@ -6998,14 +8428,14 @@
       </p:pic>
       <p:sp>
         <p:nvSpPr>
-          <p:cNvPr id="7" name="TextBox 6"/>
+          <p:cNvPr id="8" name="TextBox 7"/>
           <p:cNvSpPr txBox="1"/>
           <p:nvPr/>
         </p:nvSpPr>
         <p:spPr>
           <a:xfrm>
-            <a:off x="411480" y="6446520"/>
-            <a:ext cx="7315200" cy="320040"/>
+            <a:off x="685800" y="5879592"/>
+            <a:ext cx="10820095" cy="365760"/>
           </a:xfrm>
           <a:prstGeom prst="rect">
             <a:avLst/>
@@ -7019,29 +8449,29 @@
           <a:lstStyle/>
           <a:p>
             <a:pPr>
-              <a:defRPr sz="900">
-                <a:solidFill>
-                  <a:srgbClr val="666666"/>
-                </a:solidFill>
-                <a:latin typeface="Calibri"/>
-              </a:defRPr>
-            </a:pPr>
-            <a:r>
-              <a:t>SRH University  ·  Prof. Dr. Adele Nasti</a:t>
-            </a:r>
-          </a:p>
-        </p:txBody>
-      </p:sp>
-      <p:sp>
-        <p:nvSpPr>
-          <p:cNvPr id="8" name="TextBox 7"/>
+              <a:defRPr sz="1300" i="1">
+                <a:solidFill>
+                  <a:srgbClr val="5A5A5A"/>
+                </a:solidFill>
+                <a:latin typeface="Calibri"/>
+              </a:defRPr>
+            </a:pPr>
+            <a:r>
+              <a:t>Wind impact ≈ 3.5× temperature</a:t>
+            </a:r>
+          </a:p>
+        </p:txBody>
+      </p:sp>
+      <p:sp>
+        <p:nvSpPr>
+          <p:cNvPr id="9" name="TextBox 8"/>
           <p:cNvSpPr txBox="1"/>
           <p:nvPr/>
         </p:nvSpPr>
         <p:spPr>
           <a:xfrm>
-            <a:off x="11155680" y="6446520"/>
-            <a:ext cx="731520" cy="320040"/>
+            <a:off x="685800" y="6473952"/>
+            <a:ext cx="9144000" cy="274320"/>
           </a:xfrm>
           <a:prstGeom prst="rect">
             <a:avLst/>
@@ -7054,10 +8484,46 @@
           </a:bodyPr>
           <a:lstStyle/>
           <a:p>
+            <a:pPr>
+              <a:defRPr sz="900">
+                <a:solidFill>
+                  <a:srgbClr val="5A5A5A"/>
+                </a:solidFill>
+                <a:latin typeface="Calibri"/>
+              </a:defRPr>
+            </a:pPr>
+            <a:r>
+              <a:t>SRH University  ·  Prof. Dr. Adele Nasti</a:t>
+            </a:r>
+          </a:p>
+        </p:txBody>
+      </p:sp>
+      <p:sp>
+        <p:nvSpPr>
+          <p:cNvPr id="10" name="TextBox 9"/>
+          <p:cNvSpPr txBox="1"/>
+          <p:nvPr/>
+        </p:nvSpPr>
+        <p:spPr>
+          <a:xfrm>
+            <a:off x="11064240" y="6473952"/>
+            <a:ext cx="548640" cy="274320"/>
+          </a:xfrm>
+          <a:prstGeom prst="rect">
+            <a:avLst/>
+          </a:prstGeom>
+          <a:noFill/>
+        </p:spPr>
+        <p:txBody>
+          <a:bodyPr wrap="none">
+            <a:spAutoFit/>
+          </a:bodyPr>
+          <a:lstStyle/>
+          <a:p>
             <a:pPr algn="r">
               <a:defRPr sz="900">
                 <a:solidFill>
-                  <a:srgbClr val="666666"/>
+                  <a:srgbClr val="5A5A5A"/>
                 </a:solidFill>
                 <a:latin typeface="Calibri"/>
               </a:defRPr>
